--- a/content/outreach/templates/Conference_Template_QPACERS.pptx
+++ b/content/outreach/templates/Conference_Template_QPACERS.pptx
@@ -48,10 +48,6 @@
       <p:bold r:id="rId25"/>
       <p:italic r:id="rId26"/>
       <p:boldItalic r:id="rId27"/>
-    </p:embeddedFont>
-    <p:embeddedFont>
-      <p:font typeface="Impact" panose="020B0806030902050204" pitchFamily="34" charset="0"/>
-      <p:regular r:id="rId28"/>
     </p:embeddedFont>
   </p:embeddedFontLst>
   <p:defaultTextStyle>
@@ -288,10 +284,1117 @@
       <p15:sldGuideLst xmlns:p15="http://schemas.microsoft.com/office/powerpoint/2012/main"/>
     </p:ext>
     <p:ext uri="GoogleSlidesCustomDataVersion2">
-      <go:slidesCustomData xmlns="" xmlns:mc="http://schemas.openxmlformats.org/markup-compatibility/2006" xmlns:mv="urn:schemas-microsoft-com:mac:vml" xmlns:c="http://schemas.openxmlformats.org/drawingml/2006/chart" xmlns:dgm="http://schemas.openxmlformats.org/drawingml/2006/diagram" xmlns:o="urn:schemas-microsoft-com:office:office" xmlns:v="urn:schemas-microsoft-com:vml" xmlns:pvml="urn:schemas-microsoft-com:office:powerpoint" xmlns:com="http://schemas.openxmlformats.org/drawingml/2006/compatibility" xmlns:p14="http://schemas.microsoft.com/office/powerpoint/2010/main" xmlns:p15="http://schemas.microsoft.com/office/powerpoint/2012/main" xmlns:ahyp="http://schemas.microsoft.com/office/drawing/2018/hyperlinkcolor" xmlns:go="http://customooxmlschemas.google.com/" r:id="rId66" roundtripDataSignature="AMtx7mhe0qSpo88mU2L/T2lArqNAO6H3ZA=="/>
+      <go:slidesCustomData xmlns:go="http://customooxmlschemas.google.com/" xmlns:ahyp="http://schemas.microsoft.com/office/drawing/2018/hyperlinkcolor" xmlns:p15="http://schemas.microsoft.com/office/powerpoint/2012/main" xmlns:p14="http://schemas.microsoft.com/office/powerpoint/2010/main" xmlns:com="http://schemas.openxmlformats.org/drawingml/2006/compatibility" xmlns:pvml="urn:schemas-microsoft-com:office:powerpoint" xmlns:v="urn:schemas-microsoft-com:vml" xmlns:o="urn:schemas-microsoft-com:office:office" xmlns:dgm="http://schemas.openxmlformats.org/drawingml/2006/diagram" xmlns:c="http://schemas.openxmlformats.org/drawingml/2006/chart" xmlns:mv="urn:schemas-microsoft-com:mac:vml" xmlns:mc="http://schemas.openxmlformats.org/markup-compatibility/2006" xmlns="" r:id="rId66" roundtripDataSignature="AMtx7mhe0qSpo88mU2L/T2lArqNAO6H3ZA=="/>
     </p:ext>
   </p:extLst>
 </p:presentation>
+</file>
+
+<file path=ppt/revisionInfo.xml><?xml version="1.0" encoding="utf-8"?>
+<p1510:revInfo xmlns:a="http://schemas.openxmlformats.org/drawingml/2006/main" xmlns:r="http://schemas.openxmlformats.org/officeDocument/2006/relationships" xmlns:p1510="http://schemas.microsoft.com/office/powerpoint/2015/10/main">
+  <p1510:revLst>
+    <p1510:client id="{A842B4DD-A98C-4F8B-ABDD-DBD806F9E0F9}" v="101" dt="2026-05-01T16:05:45.018"/>
+  </p1510:revLst>
+</p1510:revInfo>
+</file>
+
+<file path=ppt/changesInfos/changesInfo1.xml><?xml version="1.0" encoding="utf-8"?>
+<pc:chgInfo xmlns:a="http://schemas.openxmlformats.org/drawingml/2006/main" xmlns:r="http://schemas.openxmlformats.org/officeDocument/2006/relationships" xmlns:ac="http://schemas.microsoft.com/office/drawing/2013/main/command" xmlns:pc="http://schemas.microsoft.com/office/powerpoint/2013/main/command">
+  <pc:docChgLst>
+    <pc:chgData name="Sajid Choudhury" userId="a37f0bd66b0f646b" providerId="LiveId" clId="{A842B4DD-A98C-4F8B-ABDD-DBD806F9E0F9}"/>
+    <pc:docChg chg="undo custSel modSld modMainMaster">
+      <pc:chgData name="Sajid Choudhury" userId="a37f0bd66b0f646b" providerId="LiveId" clId="{A842B4DD-A98C-4F8B-ABDD-DBD806F9E0F9}" dt="2026-05-01T16:05:45.018" v="226" actId="404"/>
+      <pc:docMkLst>
+        <pc:docMk/>
+      </pc:docMkLst>
+      <pc:sldChg chg="modSp mod">
+        <pc:chgData name="Sajid Choudhury" userId="a37f0bd66b0f646b" providerId="LiveId" clId="{A842B4DD-A98C-4F8B-ABDD-DBD806F9E0F9}" dt="2026-05-01T16:01:03.326" v="145" actId="207"/>
+        <pc:sldMkLst>
+          <pc:docMk/>
+          <pc:sldMk cId="0" sldId="256"/>
+        </pc:sldMkLst>
+        <pc:spChg chg="mod">
+          <ac:chgData name="Sajid Choudhury" userId="a37f0bd66b0f646b" providerId="LiveId" clId="{A842B4DD-A98C-4F8B-ABDD-DBD806F9E0F9}" dt="2026-05-01T16:00:51.144" v="141" actId="207"/>
+          <ac:spMkLst>
+            <pc:docMk/>
+            <pc:sldMk cId="0" sldId="256"/>
+            <ac:spMk id="11" creationId="{621C33C5-8883-BD7E-E8D2-8691AF6CB7A5}"/>
+          </ac:spMkLst>
+        </pc:spChg>
+        <pc:spChg chg="mod">
+          <ac:chgData name="Sajid Choudhury" userId="a37f0bd66b0f646b" providerId="LiveId" clId="{A842B4DD-A98C-4F8B-ABDD-DBD806F9E0F9}" dt="2026-05-01T16:00:56.454" v="143" actId="207"/>
+          <ac:spMkLst>
+            <pc:docMk/>
+            <pc:sldMk cId="0" sldId="256"/>
+            <ac:spMk id="12" creationId="{EC57FEBC-68D2-EB26-8AD6-17EF86FF3F1A}"/>
+          </ac:spMkLst>
+        </pc:spChg>
+        <pc:spChg chg="mod">
+          <ac:chgData name="Sajid Choudhury" userId="a37f0bd66b0f646b" providerId="LiveId" clId="{A842B4DD-A98C-4F8B-ABDD-DBD806F9E0F9}" dt="2026-05-01T16:01:03.326" v="145" actId="207"/>
+          <ac:spMkLst>
+            <pc:docMk/>
+            <pc:sldMk cId="0" sldId="256"/>
+            <ac:spMk id="13" creationId="{F52E39DC-BC11-D94B-CF04-51C2CEE9E547}"/>
+          </ac:spMkLst>
+        </pc:spChg>
+        <pc:spChg chg="mod">
+          <ac:chgData name="Sajid Choudhury" userId="a37f0bd66b0f646b" providerId="LiveId" clId="{A842B4DD-A98C-4F8B-ABDD-DBD806F9E0F9}" dt="2026-05-01T16:00:47.066" v="140" actId="207"/>
+          <ac:spMkLst>
+            <pc:docMk/>
+            <pc:sldMk cId="0" sldId="256"/>
+            <ac:spMk id="142" creationId="{00000000-0000-0000-0000-000000000000}"/>
+          </ac:spMkLst>
+        </pc:spChg>
+      </pc:sldChg>
+      <pc:sldChg chg="modSp mod">
+        <pc:chgData name="Sajid Choudhury" userId="a37f0bd66b0f646b" providerId="LiveId" clId="{A842B4DD-A98C-4F8B-ABDD-DBD806F9E0F9}" dt="2026-05-01T16:00:41.854" v="139" actId="207"/>
+        <pc:sldMkLst>
+          <pc:docMk/>
+          <pc:sldMk cId="0" sldId="257"/>
+        </pc:sldMkLst>
+        <pc:spChg chg="mod">
+          <ac:chgData name="Sajid Choudhury" userId="a37f0bd66b0f646b" providerId="LiveId" clId="{A842B4DD-A98C-4F8B-ABDD-DBD806F9E0F9}" dt="2026-05-01T16:00:41.854" v="139" actId="207"/>
+          <ac:spMkLst>
+            <pc:docMk/>
+            <pc:sldMk cId="0" sldId="257"/>
+            <ac:spMk id="5" creationId="{4591618E-1E1F-836D-6AC1-8F0668AD48E9}"/>
+          </ac:spMkLst>
+        </pc:spChg>
+        <pc:spChg chg="mod">
+          <ac:chgData name="Sajid Choudhury" userId="a37f0bd66b0f646b" providerId="LiveId" clId="{A842B4DD-A98C-4F8B-ABDD-DBD806F9E0F9}" dt="2026-05-01T16:00:35.262" v="138" actId="207"/>
+          <ac:spMkLst>
+            <pc:docMk/>
+            <pc:sldMk cId="0" sldId="257"/>
+            <ac:spMk id="155" creationId="{00000000-0000-0000-0000-000000000000}"/>
+          </ac:spMkLst>
+        </pc:spChg>
+        <pc:spChg chg="mod">
+          <ac:chgData name="Sajid Choudhury" userId="a37f0bd66b0f646b" providerId="LiveId" clId="{A842B4DD-A98C-4F8B-ABDD-DBD806F9E0F9}" dt="2026-05-01T16:00:32.355" v="137" actId="207"/>
+          <ac:spMkLst>
+            <pc:docMk/>
+            <pc:sldMk cId="0" sldId="257"/>
+            <ac:spMk id="159" creationId="{00000000-0000-0000-0000-000000000000}"/>
+          </ac:spMkLst>
+        </pc:spChg>
+        <pc:spChg chg="mod">
+          <ac:chgData name="Sajid Choudhury" userId="a37f0bd66b0f646b" providerId="LiveId" clId="{A842B4DD-A98C-4F8B-ABDD-DBD806F9E0F9}" dt="2026-05-01T16:00:32.355" v="137" actId="207"/>
+          <ac:spMkLst>
+            <pc:docMk/>
+            <pc:sldMk cId="0" sldId="257"/>
+            <ac:spMk id="160" creationId="{00000000-0000-0000-0000-000000000000}"/>
+          </ac:spMkLst>
+        </pc:spChg>
+        <pc:spChg chg="mod">
+          <ac:chgData name="Sajid Choudhury" userId="a37f0bd66b0f646b" providerId="LiveId" clId="{A842B4DD-A98C-4F8B-ABDD-DBD806F9E0F9}" dt="2026-05-01T16:00:32.355" v="137" actId="207"/>
+          <ac:spMkLst>
+            <pc:docMk/>
+            <pc:sldMk cId="0" sldId="257"/>
+            <ac:spMk id="161" creationId="{00000000-0000-0000-0000-000000000000}"/>
+          </ac:spMkLst>
+        </pc:spChg>
+        <pc:spChg chg="mod">
+          <ac:chgData name="Sajid Choudhury" userId="a37f0bd66b0f646b" providerId="LiveId" clId="{A842B4DD-A98C-4F8B-ABDD-DBD806F9E0F9}" dt="2026-05-01T16:00:32.355" v="137" actId="207"/>
+          <ac:spMkLst>
+            <pc:docMk/>
+            <pc:sldMk cId="0" sldId="257"/>
+            <ac:spMk id="162" creationId="{00000000-0000-0000-0000-000000000000}"/>
+          </ac:spMkLst>
+        </pc:spChg>
+        <pc:spChg chg="mod">
+          <ac:chgData name="Sajid Choudhury" userId="a37f0bd66b0f646b" providerId="LiveId" clId="{A842B4DD-A98C-4F8B-ABDD-DBD806F9E0F9}" dt="2026-05-01T16:00:32.355" v="137" actId="207"/>
+          <ac:spMkLst>
+            <pc:docMk/>
+            <pc:sldMk cId="0" sldId="257"/>
+            <ac:spMk id="163" creationId="{00000000-0000-0000-0000-000000000000}"/>
+          </ac:spMkLst>
+        </pc:spChg>
+        <pc:spChg chg="mod">
+          <ac:chgData name="Sajid Choudhury" userId="a37f0bd66b0f646b" providerId="LiveId" clId="{A842B4DD-A98C-4F8B-ABDD-DBD806F9E0F9}" dt="2026-05-01T16:00:32.355" v="137" actId="207"/>
+          <ac:spMkLst>
+            <pc:docMk/>
+            <pc:sldMk cId="0" sldId="257"/>
+            <ac:spMk id="164" creationId="{00000000-0000-0000-0000-000000000000}"/>
+          </ac:spMkLst>
+        </pc:spChg>
+        <pc:spChg chg="mod">
+          <ac:chgData name="Sajid Choudhury" userId="a37f0bd66b0f646b" providerId="LiveId" clId="{A842B4DD-A98C-4F8B-ABDD-DBD806F9E0F9}" dt="2026-05-01T16:00:32.355" v="137" actId="207"/>
+          <ac:spMkLst>
+            <pc:docMk/>
+            <pc:sldMk cId="0" sldId="257"/>
+            <ac:spMk id="165" creationId="{00000000-0000-0000-0000-000000000000}"/>
+          </ac:spMkLst>
+        </pc:spChg>
+        <pc:spChg chg="mod">
+          <ac:chgData name="Sajid Choudhury" userId="a37f0bd66b0f646b" providerId="LiveId" clId="{A842B4DD-A98C-4F8B-ABDD-DBD806F9E0F9}" dt="2026-05-01T16:00:32.355" v="137" actId="207"/>
+          <ac:spMkLst>
+            <pc:docMk/>
+            <pc:sldMk cId="0" sldId="257"/>
+            <ac:spMk id="166" creationId="{00000000-0000-0000-0000-000000000000}"/>
+          </ac:spMkLst>
+        </pc:spChg>
+        <pc:spChg chg="mod">
+          <ac:chgData name="Sajid Choudhury" userId="a37f0bd66b0f646b" providerId="LiveId" clId="{A842B4DD-A98C-4F8B-ABDD-DBD806F9E0F9}" dt="2026-05-01T16:00:32.355" v="137" actId="207"/>
+          <ac:spMkLst>
+            <pc:docMk/>
+            <pc:sldMk cId="0" sldId="257"/>
+            <ac:spMk id="167" creationId="{00000000-0000-0000-0000-000000000000}"/>
+          </ac:spMkLst>
+        </pc:spChg>
+        <pc:spChg chg="mod">
+          <ac:chgData name="Sajid Choudhury" userId="a37f0bd66b0f646b" providerId="LiveId" clId="{A842B4DD-A98C-4F8B-ABDD-DBD806F9E0F9}" dt="2026-05-01T16:00:32.355" v="137" actId="207"/>
+          <ac:spMkLst>
+            <pc:docMk/>
+            <pc:sldMk cId="0" sldId="257"/>
+            <ac:spMk id="168" creationId="{00000000-0000-0000-0000-000000000000}"/>
+          </ac:spMkLst>
+        </pc:spChg>
+        <pc:spChg chg="mod">
+          <ac:chgData name="Sajid Choudhury" userId="a37f0bd66b0f646b" providerId="LiveId" clId="{A842B4DD-A98C-4F8B-ABDD-DBD806F9E0F9}" dt="2026-05-01T16:00:32.355" v="137" actId="207"/>
+          <ac:spMkLst>
+            <pc:docMk/>
+            <pc:sldMk cId="0" sldId="257"/>
+            <ac:spMk id="169" creationId="{00000000-0000-0000-0000-000000000000}"/>
+          </ac:spMkLst>
+        </pc:spChg>
+        <pc:spChg chg="mod">
+          <ac:chgData name="Sajid Choudhury" userId="a37f0bd66b0f646b" providerId="LiveId" clId="{A842B4DD-A98C-4F8B-ABDD-DBD806F9E0F9}" dt="2026-05-01T16:00:32.355" v="137" actId="207"/>
+          <ac:spMkLst>
+            <pc:docMk/>
+            <pc:sldMk cId="0" sldId="257"/>
+            <ac:spMk id="170" creationId="{00000000-0000-0000-0000-000000000000}"/>
+          </ac:spMkLst>
+        </pc:spChg>
+        <pc:spChg chg="mod">
+          <ac:chgData name="Sajid Choudhury" userId="a37f0bd66b0f646b" providerId="LiveId" clId="{A842B4DD-A98C-4F8B-ABDD-DBD806F9E0F9}" dt="2026-05-01T16:00:32.355" v="137" actId="207"/>
+          <ac:spMkLst>
+            <pc:docMk/>
+            <pc:sldMk cId="0" sldId="257"/>
+            <ac:spMk id="171" creationId="{00000000-0000-0000-0000-000000000000}"/>
+          </ac:spMkLst>
+        </pc:spChg>
+        <pc:spChg chg="mod">
+          <ac:chgData name="Sajid Choudhury" userId="a37f0bd66b0f646b" providerId="LiveId" clId="{A842B4DD-A98C-4F8B-ABDD-DBD806F9E0F9}" dt="2026-05-01T16:00:32.355" v="137" actId="207"/>
+          <ac:spMkLst>
+            <pc:docMk/>
+            <pc:sldMk cId="0" sldId="257"/>
+            <ac:spMk id="172" creationId="{00000000-0000-0000-0000-000000000000}"/>
+          </ac:spMkLst>
+        </pc:spChg>
+        <pc:grpChg chg="mod">
+          <ac:chgData name="Sajid Choudhury" userId="a37f0bd66b0f646b" providerId="LiveId" clId="{A842B4DD-A98C-4F8B-ABDD-DBD806F9E0F9}" dt="2026-05-01T16:00:32.355" v="137" actId="207"/>
+          <ac:grpSpMkLst>
+            <pc:docMk/>
+            <pc:sldMk cId="0" sldId="257"/>
+            <ac:grpSpMk id="158" creationId="{00000000-0000-0000-0000-000000000000}"/>
+          </ac:grpSpMkLst>
+        </pc:grpChg>
+      </pc:sldChg>
+      <pc:sldChg chg="modSp mod">
+        <pc:chgData name="Sajid Choudhury" userId="a37f0bd66b0f646b" providerId="LiveId" clId="{A842B4DD-A98C-4F8B-ABDD-DBD806F9E0F9}" dt="2026-05-01T16:05:29.350" v="219" actId="27636"/>
+        <pc:sldMkLst>
+          <pc:docMk/>
+          <pc:sldMk cId="2046196744" sldId="264"/>
+        </pc:sldMkLst>
+        <pc:spChg chg="mod">
+          <ac:chgData name="Sajid Choudhury" userId="a37f0bd66b0f646b" providerId="LiveId" clId="{A842B4DD-A98C-4F8B-ABDD-DBD806F9E0F9}" dt="2026-05-01T16:05:29.350" v="219" actId="27636"/>
+          <ac:spMkLst>
+            <pc:docMk/>
+            <pc:sldMk cId="2046196744" sldId="264"/>
+            <ac:spMk id="6" creationId="{F684031F-B59E-4E3B-882C-F79807330BBD}"/>
+          </ac:spMkLst>
+        </pc:spChg>
+      </pc:sldChg>
+      <pc:sldMasterChg chg="addSp delSp modSp mod modSldLayout">
+        <pc:chgData name="Sajid Choudhury" userId="a37f0bd66b0f646b" providerId="LiveId" clId="{A842B4DD-A98C-4F8B-ABDD-DBD806F9E0F9}" dt="2026-05-01T16:05:45.018" v="226" actId="404"/>
+        <pc:sldMasterMkLst>
+          <pc:docMk/>
+          <pc:sldMasterMk cId="0" sldId="2147483648"/>
+        </pc:sldMasterMkLst>
+        <pc:spChg chg="del mod topLvl">
+          <ac:chgData name="Sajid Choudhury" userId="a37f0bd66b0f646b" providerId="LiveId" clId="{A842B4DD-A98C-4F8B-ABDD-DBD806F9E0F9}" dt="2026-05-01T15:57:40.171" v="90" actId="478"/>
+          <ac:spMkLst>
+            <pc:docMk/>
+            <pc:sldMasterMk cId="0" sldId="2147483648"/>
+            <ac:spMk id="9" creationId="{039869B6-F6AD-C386-4F6E-3A529B4BA236}"/>
+          </ac:spMkLst>
+        </pc:spChg>
+        <pc:spChg chg="add del mod">
+          <ac:chgData name="Sajid Choudhury" userId="a37f0bd66b0f646b" providerId="LiveId" clId="{A842B4DD-A98C-4F8B-ABDD-DBD806F9E0F9}" dt="2026-05-01T15:58:46.935" v="119" actId="207"/>
+          <ac:spMkLst>
+            <pc:docMk/>
+            <pc:sldMasterMk cId="0" sldId="2147483648"/>
+            <ac:spMk id="10" creationId="{00000000-0000-0000-0000-000000000000}"/>
+          </ac:spMkLst>
+        </pc:spChg>
+        <pc:spChg chg="mod">
+          <ac:chgData name="Sajid Choudhury" userId="a37f0bd66b0f646b" providerId="LiveId" clId="{A842B4DD-A98C-4F8B-ABDD-DBD806F9E0F9}" dt="2026-05-01T16:05:39.046" v="223" actId="207"/>
+          <ac:spMkLst>
+            <pc:docMk/>
+            <pc:sldMasterMk cId="0" sldId="2147483648"/>
+            <ac:spMk id="11" creationId="{00000000-0000-0000-0000-000000000000}"/>
+          </ac:spMkLst>
+        </pc:spChg>
+        <pc:spChg chg="mod">
+          <ac:chgData name="Sajid Choudhury" userId="a37f0bd66b0f646b" providerId="LiveId" clId="{A842B4DD-A98C-4F8B-ABDD-DBD806F9E0F9}" dt="2026-05-01T16:05:45.018" v="226" actId="404"/>
+          <ac:spMkLst>
+            <pc:docMk/>
+            <pc:sldMasterMk cId="0" sldId="2147483648"/>
+            <ac:spMk id="12" creationId="{00000000-0000-0000-0000-000000000000}"/>
+          </ac:spMkLst>
+        </pc:spChg>
+        <pc:spChg chg="mod">
+          <ac:chgData name="Sajid Choudhury" userId="a37f0bd66b0f646b" providerId="LiveId" clId="{A842B4DD-A98C-4F8B-ABDD-DBD806F9E0F9}" dt="2026-05-01T15:59:17.554" v="125" actId="207"/>
+          <ac:spMkLst>
+            <pc:docMk/>
+            <pc:sldMasterMk cId="0" sldId="2147483648"/>
+            <ac:spMk id="13" creationId="{00000000-0000-0000-0000-000000000000}"/>
+          </ac:spMkLst>
+        </pc:spChg>
+        <pc:spChg chg="mod">
+          <ac:chgData name="Sajid Choudhury" userId="a37f0bd66b0f646b" providerId="LiveId" clId="{A842B4DD-A98C-4F8B-ABDD-DBD806F9E0F9}" dt="2026-05-01T15:59:14.938" v="124" actId="207"/>
+          <ac:spMkLst>
+            <pc:docMk/>
+            <pc:sldMasterMk cId="0" sldId="2147483648"/>
+            <ac:spMk id="14" creationId="{00000000-0000-0000-0000-000000000000}"/>
+          </ac:spMkLst>
+        </pc:spChg>
+        <pc:spChg chg="mod">
+          <ac:chgData name="Sajid Choudhury" userId="a37f0bd66b0f646b" providerId="LiveId" clId="{A842B4DD-A98C-4F8B-ABDD-DBD806F9E0F9}" dt="2026-05-01T15:59:12.734" v="123" actId="207"/>
+          <ac:spMkLst>
+            <pc:docMk/>
+            <pc:sldMasterMk cId="0" sldId="2147483648"/>
+            <ac:spMk id="15" creationId="{00000000-0000-0000-0000-000000000000}"/>
+          </ac:spMkLst>
+        </pc:spChg>
+        <pc:spChg chg="del mod topLvl">
+          <ac:chgData name="Sajid Choudhury" userId="a37f0bd66b0f646b" providerId="LiveId" clId="{A842B4DD-A98C-4F8B-ABDD-DBD806F9E0F9}" dt="2026-05-01T15:57:38.579" v="89" actId="478"/>
+          <ac:spMkLst>
+            <pc:docMk/>
+            <pc:sldMasterMk cId="0" sldId="2147483648"/>
+            <ac:spMk id="16" creationId="{0AC50849-0F59-D96C-7652-571E31538386}"/>
+          </ac:spMkLst>
+        </pc:spChg>
+        <pc:grpChg chg="del">
+          <ac:chgData name="Sajid Choudhury" userId="a37f0bd66b0f646b" providerId="LiveId" clId="{A842B4DD-A98C-4F8B-ABDD-DBD806F9E0F9}" dt="2026-05-01T15:57:32.428" v="87" actId="165"/>
+          <ac:grpSpMkLst>
+            <pc:docMk/>
+            <pc:sldMasterMk cId="0" sldId="2147483648"/>
+            <ac:grpSpMk id="18" creationId="{A8857D7D-2A06-0290-2779-8649E24E9D2E}"/>
+          </ac:grpSpMkLst>
+        </pc:grpChg>
+        <pc:picChg chg="del mod topLvl">
+          <ac:chgData name="Sajid Choudhury" userId="a37f0bd66b0f646b" providerId="LiveId" clId="{A842B4DD-A98C-4F8B-ABDD-DBD806F9E0F9}" dt="2026-05-01T15:57:34.851" v="88" actId="478"/>
+          <ac:picMkLst>
+            <pc:docMk/>
+            <pc:sldMasterMk cId="0" sldId="2147483648"/>
+            <ac:picMk id="2" creationId="{D5B28BCC-8EAE-B021-667E-F684E2DEA784}"/>
+          </ac:picMkLst>
+        </pc:picChg>
+        <pc:picChg chg="add mod">
+          <ac:chgData name="Sajid Choudhury" userId="a37f0bd66b0f646b" providerId="LiveId" clId="{A842B4DD-A98C-4F8B-ABDD-DBD806F9E0F9}" dt="2026-05-01T15:57:50.215" v="93" actId="1076"/>
+          <ac:picMkLst>
+            <pc:docMk/>
+            <pc:sldMasterMk cId="0" sldId="2147483648"/>
+            <ac:picMk id="3" creationId="{AB3CC94E-4748-0374-7ED5-05B43B3E8DFE}"/>
+          </ac:picMkLst>
+        </pc:picChg>
+        <pc:picChg chg="del mod topLvl">
+          <ac:chgData name="Sajid Choudhury" userId="a37f0bd66b0f646b" providerId="LiveId" clId="{A842B4DD-A98C-4F8B-ABDD-DBD806F9E0F9}" dt="2026-05-01T15:57:42.113" v="91" actId="478"/>
+          <ac:picMkLst>
+            <pc:docMk/>
+            <pc:sldMasterMk cId="0" sldId="2147483648"/>
+            <ac:picMk id="8" creationId="{F1DEE58E-FC03-E272-8D6C-61DDF099ADED}"/>
+          </ac:picMkLst>
+        </pc:picChg>
+        <pc:picChg chg="mod">
+          <ac:chgData name="Sajid Choudhury" userId="a37f0bd66b0f646b" providerId="LiveId" clId="{A842B4DD-A98C-4F8B-ABDD-DBD806F9E0F9}" dt="2026-05-01T15:59:23.302" v="126"/>
+          <ac:picMkLst>
+            <pc:docMk/>
+            <pc:sldMasterMk cId="0" sldId="2147483648"/>
+            <ac:picMk id="21" creationId="{8078A617-8F8E-0E6A-AD58-3A341B0783D4}"/>
+          </ac:picMkLst>
+        </pc:picChg>
+        <pc:sldLayoutChg chg="addSp delSp modSp mod">
+          <pc:chgData name="Sajid Choudhury" userId="a37f0bd66b0f646b" providerId="LiveId" clId="{A842B4DD-A98C-4F8B-ABDD-DBD806F9E0F9}" dt="2026-05-01T15:56:34.177" v="80" actId="207"/>
+          <pc:sldLayoutMkLst>
+            <pc:docMk/>
+            <pc:sldMasterMk cId="0" sldId="2147483648"/>
+            <pc:sldLayoutMk cId="0" sldId="2147483649"/>
+          </pc:sldLayoutMkLst>
+          <pc:spChg chg="del mod">
+            <ac:chgData name="Sajid Choudhury" userId="a37f0bd66b0f646b" providerId="LiveId" clId="{A842B4DD-A98C-4F8B-ABDD-DBD806F9E0F9}" dt="2026-05-01T15:54:14.520" v="38" actId="478"/>
+            <ac:spMkLst>
+              <pc:docMk/>
+              <pc:sldMasterMk cId="0" sldId="2147483648"/>
+              <pc:sldLayoutMk cId="0" sldId="2147483649"/>
+              <ac:spMk id="5" creationId="{E4627D99-5E74-846F-2814-D16B5EFC627B}"/>
+            </ac:spMkLst>
+          </pc:spChg>
+          <pc:spChg chg="add mod">
+            <ac:chgData name="Sajid Choudhury" userId="a37f0bd66b0f646b" providerId="LiveId" clId="{A842B4DD-A98C-4F8B-ABDD-DBD806F9E0F9}" dt="2026-05-01T15:55:23.543" v="78" actId="1037"/>
+            <ac:spMkLst>
+              <pc:docMk/>
+              <pc:sldMasterMk cId="0" sldId="2147483648"/>
+              <pc:sldLayoutMk cId="0" sldId="2147483649"/>
+              <ac:spMk id="12" creationId="{AC9B43C1-7C45-9D57-CF24-73428B4A103E}"/>
+            </ac:spMkLst>
+          </pc:spChg>
+          <pc:spChg chg="add del mod">
+            <ac:chgData name="Sajid Choudhury" userId="a37f0bd66b0f646b" providerId="LiveId" clId="{A842B4DD-A98C-4F8B-ABDD-DBD806F9E0F9}" dt="2026-05-01T15:50:27.967" v="16" actId="1076"/>
+            <ac:spMkLst>
+              <pc:docMk/>
+              <pc:sldMasterMk cId="0" sldId="2147483648"/>
+              <pc:sldLayoutMk cId="0" sldId="2147483649"/>
+              <ac:spMk id="19" creationId="{00000000-0000-0000-0000-000000000000}"/>
+            </ac:spMkLst>
+          </pc:spChg>
+          <pc:spChg chg="mod">
+            <ac:chgData name="Sajid Choudhury" userId="a37f0bd66b0f646b" providerId="LiveId" clId="{A842B4DD-A98C-4F8B-ABDD-DBD806F9E0F9}" dt="2026-05-01T15:54:37.179" v="42" actId="1076"/>
+            <ac:spMkLst>
+              <pc:docMk/>
+              <pc:sldMasterMk cId="0" sldId="2147483648"/>
+              <pc:sldLayoutMk cId="0" sldId="2147483649"/>
+              <ac:spMk id="21" creationId="{00000000-0000-0000-0000-000000000000}"/>
+            </ac:spMkLst>
+          </pc:spChg>
+          <pc:picChg chg="add mod">
+            <ac:chgData name="Sajid Choudhury" userId="a37f0bd66b0f646b" providerId="LiveId" clId="{A842B4DD-A98C-4F8B-ABDD-DBD806F9E0F9}" dt="2026-05-01T15:50:20.469" v="12"/>
+            <ac:picMkLst>
+              <pc:docMk/>
+              <pc:sldMasterMk cId="0" sldId="2147483648"/>
+              <pc:sldLayoutMk cId="0" sldId="2147483649"/>
+              <ac:picMk id="4" creationId="{C4EEEC9C-56F6-0F85-AB7C-34B29FCEF60B}"/>
+            </ac:picMkLst>
+          </pc:picChg>
+          <pc:picChg chg="mod">
+            <ac:chgData name="Sajid Choudhury" userId="a37f0bd66b0f646b" providerId="LiveId" clId="{A842B4DD-A98C-4F8B-ABDD-DBD806F9E0F9}" dt="2026-05-01T15:56:34.177" v="80" actId="207"/>
+            <ac:picMkLst>
+              <pc:docMk/>
+              <pc:sldMasterMk cId="0" sldId="2147483648"/>
+              <pc:sldLayoutMk cId="0" sldId="2147483649"/>
+              <ac:picMk id="7" creationId="{15BD070A-CB40-3F6B-77EE-14F939BB93E8}"/>
+            </ac:picMkLst>
+          </pc:picChg>
+          <pc:picChg chg="add del mod">
+            <ac:chgData name="Sajid Choudhury" userId="a37f0bd66b0f646b" providerId="LiveId" clId="{A842B4DD-A98C-4F8B-ABDD-DBD806F9E0F9}" dt="2026-05-01T15:52:28.686" v="30" actId="478"/>
+            <ac:picMkLst>
+              <pc:docMk/>
+              <pc:sldMasterMk cId="0" sldId="2147483648"/>
+              <pc:sldLayoutMk cId="0" sldId="2147483649"/>
+              <ac:picMk id="8" creationId="{EF04A6D5-F401-456C-ED57-1F83DE16BBDC}"/>
+            </ac:picMkLst>
+          </pc:picChg>
+          <pc:picChg chg="del">
+            <ac:chgData name="Sajid Choudhury" userId="a37f0bd66b0f646b" providerId="LiveId" clId="{A842B4DD-A98C-4F8B-ABDD-DBD806F9E0F9}" dt="2026-05-01T15:48:45.222" v="0" actId="478"/>
+            <ac:picMkLst>
+              <pc:docMk/>
+              <pc:sldMasterMk cId="0" sldId="2147483648"/>
+              <pc:sldLayoutMk cId="0" sldId="2147483649"/>
+              <ac:picMk id="9" creationId="{12AF1EFC-6641-F02E-AC16-9D0E97697CBB}"/>
+            </ac:picMkLst>
+          </pc:picChg>
+          <pc:picChg chg="add mod">
+            <ac:chgData name="Sajid Choudhury" userId="a37f0bd66b0f646b" providerId="LiveId" clId="{A842B4DD-A98C-4F8B-ABDD-DBD806F9E0F9}" dt="2026-05-01T15:54:43.457" v="44" actId="14100"/>
+            <ac:picMkLst>
+              <pc:docMk/>
+              <pc:sldMasterMk cId="0" sldId="2147483648"/>
+              <pc:sldLayoutMk cId="0" sldId="2147483649"/>
+              <ac:picMk id="10" creationId="{D831AFB4-7688-8D92-6798-5C8125912625}"/>
+            </ac:picMkLst>
+          </pc:picChg>
+          <pc:picChg chg="add mod">
+            <ac:chgData name="Sajid Choudhury" userId="a37f0bd66b0f646b" providerId="LiveId" clId="{A842B4DD-A98C-4F8B-ABDD-DBD806F9E0F9}" dt="2026-05-01T15:54:55.542" v="46" actId="1076"/>
+            <ac:picMkLst>
+              <pc:docMk/>
+              <pc:sldMasterMk cId="0" sldId="2147483648"/>
+              <pc:sldLayoutMk cId="0" sldId="2147483649"/>
+              <ac:picMk id="11" creationId="{5D62FD1E-ABAD-E2F0-9469-A9C6E6F1E221}"/>
+            </ac:picMkLst>
+          </pc:picChg>
+        </pc:sldLayoutChg>
+        <pc:sldLayoutChg chg="modSp">
+          <pc:chgData name="Sajid Choudhury" userId="a37f0bd66b0f646b" providerId="LiveId" clId="{A842B4DD-A98C-4F8B-ABDD-DBD806F9E0F9}" dt="2026-05-01T16:04:08.849" v="186" actId="404"/>
+          <pc:sldLayoutMkLst>
+            <pc:docMk/>
+            <pc:sldMasterMk cId="0" sldId="2147483648"/>
+            <pc:sldLayoutMk cId="0" sldId="2147483650"/>
+          </pc:sldLayoutMkLst>
+          <pc:spChg chg="mod">
+            <ac:chgData name="Sajid Choudhury" userId="a37f0bd66b0f646b" providerId="LiveId" clId="{A842B4DD-A98C-4F8B-ABDD-DBD806F9E0F9}" dt="2026-05-01T16:04:08.849" v="186" actId="404"/>
+            <ac:spMkLst>
+              <pc:docMk/>
+              <pc:sldMasterMk cId="0" sldId="2147483648"/>
+              <pc:sldLayoutMk cId="0" sldId="2147483650"/>
+              <ac:spMk id="29" creationId="{00000000-0000-0000-0000-000000000000}"/>
+            </ac:spMkLst>
+          </pc:spChg>
+          <pc:spChg chg="mod">
+            <ac:chgData name="Sajid Choudhury" userId="a37f0bd66b0f646b" providerId="LiveId" clId="{A842B4DD-A98C-4F8B-ABDD-DBD806F9E0F9}" dt="2026-05-01T16:01:40.805" v="150" actId="207"/>
+            <ac:spMkLst>
+              <pc:docMk/>
+              <pc:sldMasterMk cId="0" sldId="2147483648"/>
+              <pc:sldLayoutMk cId="0" sldId="2147483650"/>
+              <ac:spMk id="31" creationId="{00000000-0000-0000-0000-000000000000}"/>
+            </ac:spMkLst>
+          </pc:spChg>
+        </pc:sldLayoutChg>
+        <pc:sldLayoutChg chg="modSp">
+          <pc:chgData name="Sajid Choudhury" userId="a37f0bd66b0f646b" providerId="LiveId" clId="{A842B4DD-A98C-4F8B-ABDD-DBD806F9E0F9}" dt="2026-05-01T16:04:19.377" v="191" actId="404"/>
+          <pc:sldLayoutMkLst>
+            <pc:docMk/>
+            <pc:sldMasterMk cId="0" sldId="2147483648"/>
+            <pc:sldLayoutMk cId="0" sldId="2147483653"/>
+          </pc:sldLayoutMkLst>
+          <pc:spChg chg="mod">
+            <ac:chgData name="Sajid Choudhury" userId="a37f0bd66b0f646b" providerId="LiveId" clId="{A842B4DD-A98C-4F8B-ABDD-DBD806F9E0F9}" dt="2026-05-01T16:02:11.092" v="153" actId="207"/>
+            <ac:spMkLst>
+              <pc:docMk/>
+              <pc:sldMasterMk cId="0" sldId="2147483648"/>
+              <pc:sldLayoutMk cId="0" sldId="2147483653"/>
+              <ac:spMk id="6" creationId="{67CC35A9-761B-C86C-0E96-35D666E5C514}"/>
+            </ac:spMkLst>
+          </pc:spChg>
+          <pc:spChg chg="mod">
+            <ac:chgData name="Sajid Choudhury" userId="a37f0bd66b0f646b" providerId="LiveId" clId="{A842B4DD-A98C-4F8B-ABDD-DBD806F9E0F9}" dt="2026-05-01T16:02:11.092" v="153" actId="207"/>
+            <ac:spMkLst>
+              <pc:docMk/>
+              <pc:sldMasterMk cId="0" sldId="2147483648"/>
+              <pc:sldLayoutMk cId="0" sldId="2147483653"/>
+              <ac:spMk id="7" creationId="{AD17E46C-1DEE-78F6-AB33-CA009A4C94CE}"/>
+            </ac:spMkLst>
+          </pc:spChg>
+          <pc:spChg chg="mod">
+            <ac:chgData name="Sajid Choudhury" userId="a37f0bd66b0f646b" providerId="LiveId" clId="{A842B4DD-A98C-4F8B-ABDD-DBD806F9E0F9}" dt="2026-05-01T16:02:11.092" v="153" actId="207"/>
+            <ac:spMkLst>
+              <pc:docMk/>
+              <pc:sldMasterMk cId="0" sldId="2147483648"/>
+              <pc:sldLayoutMk cId="0" sldId="2147483653"/>
+              <ac:spMk id="8" creationId="{611DCCFB-4C29-BE99-E1E0-F1852638C3AB}"/>
+            </ac:spMkLst>
+          </pc:spChg>
+          <pc:spChg chg="mod">
+            <ac:chgData name="Sajid Choudhury" userId="a37f0bd66b0f646b" providerId="LiveId" clId="{A842B4DD-A98C-4F8B-ABDD-DBD806F9E0F9}" dt="2026-05-01T16:04:13.398" v="188" actId="404"/>
+            <ac:spMkLst>
+              <pc:docMk/>
+              <pc:sldMasterMk cId="0" sldId="2147483648"/>
+              <pc:sldLayoutMk cId="0" sldId="2147483653"/>
+              <ac:spMk id="55" creationId="{00000000-0000-0000-0000-000000000000}"/>
+            </ac:spMkLst>
+          </pc:spChg>
+          <pc:spChg chg="mod">
+            <ac:chgData name="Sajid Choudhury" userId="a37f0bd66b0f646b" providerId="LiveId" clId="{A842B4DD-A98C-4F8B-ABDD-DBD806F9E0F9}" dt="2026-05-01T16:04:19.377" v="191" actId="404"/>
+            <ac:spMkLst>
+              <pc:docMk/>
+              <pc:sldMasterMk cId="0" sldId="2147483648"/>
+              <pc:sldLayoutMk cId="0" sldId="2147483653"/>
+              <ac:spMk id="59" creationId="{00000000-0000-0000-0000-000000000000}"/>
+            </ac:spMkLst>
+          </pc:spChg>
+          <pc:spChg chg="mod">
+            <ac:chgData name="Sajid Choudhury" userId="a37f0bd66b0f646b" providerId="LiveId" clId="{A842B4DD-A98C-4F8B-ABDD-DBD806F9E0F9}" dt="2026-05-01T16:04:19.377" v="191" actId="404"/>
+            <ac:spMkLst>
+              <pc:docMk/>
+              <pc:sldMasterMk cId="0" sldId="2147483648"/>
+              <pc:sldLayoutMk cId="0" sldId="2147483653"/>
+              <ac:spMk id="60" creationId="{00000000-0000-0000-0000-000000000000}"/>
+            </ac:spMkLst>
+          </pc:spChg>
+          <pc:spChg chg="mod">
+            <ac:chgData name="Sajid Choudhury" userId="a37f0bd66b0f646b" providerId="LiveId" clId="{A842B4DD-A98C-4F8B-ABDD-DBD806F9E0F9}" dt="2026-05-01T16:04:16.259" v="189" actId="404"/>
+            <ac:spMkLst>
+              <pc:docMk/>
+              <pc:sldMasterMk cId="0" sldId="2147483648"/>
+              <pc:sldLayoutMk cId="0" sldId="2147483653"/>
+              <ac:spMk id="61" creationId="{00000000-0000-0000-0000-000000000000}"/>
+            </ac:spMkLst>
+          </pc:spChg>
+        </pc:sldLayoutChg>
+        <pc:sldLayoutChg chg="modSp mod">
+          <pc:chgData name="Sajid Choudhury" userId="a37f0bd66b0f646b" providerId="LiveId" clId="{A842B4DD-A98C-4F8B-ABDD-DBD806F9E0F9}" dt="2026-05-01T16:04:24.214" v="192" actId="207"/>
+          <pc:sldLayoutMkLst>
+            <pc:docMk/>
+            <pc:sldMasterMk cId="0" sldId="2147483648"/>
+            <pc:sldLayoutMk cId="0" sldId="2147483655"/>
+          </pc:sldLayoutMkLst>
+          <pc:spChg chg="mod">
+            <ac:chgData name="Sajid Choudhury" userId="a37f0bd66b0f646b" providerId="LiveId" clId="{A842B4DD-A98C-4F8B-ABDD-DBD806F9E0F9}" dt="2026-05-01T16:04:24.214" v="192" actId="207"/>
+            <ac:spMkLst>
+              <pc:docMk/>
+              <pc:sldMasterMk cId="0" sldId="2147483648"/>
+              <pc:sldLayoutMk cId="0" sldId="2147483655"/>
+              <ac:spMk id="70" creationId="{00000000-0000-0000-0000-000000000000}"/>
+            </ac:spMkLst>
+          </pc:spChg>
+        </pc:sldLayoutChg>
+        <pc:sldLayoutChg chg="modSp">
+          <pc:chgData name="Sajid Choudhury" userId="a37f0bd66b0f646b" providerId="LiveId" clId="{A842B4DD-A98C-4F8B-ABDD-DBD806F9E0F9}" dt="2026-05-01T16:04:29.218" v="193" actId="207"/>
+          <pc:sldLayoutMkLst>
+            <pc:docMk/>
+            <pc:sldMasterMk cId="0" sldId="2147483648"/>
+            <pc:sldLayoutMk cId="0" sldId="2147483656"/>
+          </pc:sldLayoutMkLst>
+          <pc:spChg chg="mod">
+            <ac:chgData name="Sajid Choudhury" userId="a37f0bd66b0f646b" providerId="LiveId" clId="{A842B4DD-A98C-4F8B-ABDD-DBD806F9E0F9}" dt="2026-05-01T16:02:17.375" v="154" actId="207"/>
+            <ac:spMkLst>
+              <pc:docMk/>
+              <pc:sldMasterMk cId="0" sldId="2147483648"/>
+              <pc:sldLayoutMk cId="0" sldId="2147483656"/>
+              <ac:spMk id="5" creationId="{77C872A2-EAA0-70F8-B1F4-8521EF15351F}"/>
+            </ac:spMkLst>
+          </pc:spChg>
+          <pc:spChg chg="mod">
+            <ac:chgData name="Sajid Choudhury" userId="a37f0bd66b0f646b" providerId="LiveId" clId="{A842B4DD-A98C-4F8B-ABDD-DBD806F9E0F9}" dt="2026-05-01T16:02:17.375" v="154" actId="207"/>
+            <ac:spMkLst>
+              <pc:docMk/>
+              <pc:sldMasterMk cId="0" sldId="2147483648"/>
+              <pc:sldLayoutMk cId="0" sldId="2147483656"/>
+              <ac:spMk id="6" creationId="{ACE8EBC2-4D03-8BB3-3B2F-E7F39EFEA443}"/>
+            </ac:spMkLst>
+          </pc:spChg>
+          <pc:spChg chg="mod">
+            <ac:chgData name="Sajid Choudhury" userId="a37f0bd66b0f646b" providerId="LiveId" clId="{A842B4DD-A98C-4F8B-ABDD-DBD806F9E0F9}" dt="2026-05-01T16:02:17.375" v="154" actId="207"/>
+            <ac:spMkLst>
+              <pc:docMk/>
+              <pc:sldMasterMk cId="0" sldId="2147483648"/>
+              <pc:sldLayoutMk cId="0" sldId="2147483656"/>
+              <ac:spMk id="7" creationId="{37E87868-5B9C-F826-AD3C-BDA24627C804}"/>
+            </ac:spMkLst>
+          </pc:spChg>
+          <pc:spChg chg="mod">
+            <ac:chgData name="Sajid Choudhury" userId="a37f0bd66b0f646b" providerId="LiveId" clId="{A842B4DD-A98C-4F8B-ABDD-DBD806F9E0F9}" dt="2026-05-01T16:04:29.218" v="193" actId="207"/>
+            <ac:spMkLst>
+              <pc:docMk/>
+              <pc:sldMasterMk cId="0" sldId="2147483648"/>
+              <pc:sldLayoutMk cId="0" sldId="2147483656"/>
+              <ac:spMk id="80" creationId="{00000000-0000-0000-0000-000000000000}"/>
+            </ac:spMkLst>
+          </pc:spChg>
+        </pc:sldLayoutChg>
+        <pc:sldLayoutChg chg="modSp">
+          <pc:chgData name="Sajid Choudhury" userId="a37f0bd66b0f646b" providerId="LiveId" clId="{A842B4DD-A98C-4F8B-ABDD-DBD806F9E0F9}" dt="2026-05-01T16:02:21.218" v="155" actId="207"/>
+          <pc:sldLayoutMkLst>
+            <pc:docMk/>
+            <pc:sldMasterMk cId="0" sldId="2147483648"/>
+            <pc:sldLayoutMk cId="0" sldId="2147483657"/>
+          </pc:sldLayoutMkLst>
+          <pc:spChg chg="mod">
+            <ac:chgData name="Sajid Choudhury" userId="a37f0bd66b0f646b" providerId="LiveId" clId="{A842B4DD-A98C-4F8B-ABDD-DBD806F9E0F9}" dt="2026-05-01T16:02:21.218" v="155" actId="207"/>
+            <ac:spMkLst>
+              <pc:docMk/>
+              <pc:sldMasterMk cId="0" sldId="2147483648"/>
+              <pc:sldLayoutMk cId="0" sldId="2147483657"/>
+              <ac:spMk id="5" creationId="{17C9BF4D-A02F-0583-1E93-EB5877DFC91E}"/>
+            </ac:spMkLst>
+          </pc:spChg>
+          <pc:spChg chg="mod">
+            <ac:chgData name="Sajid Choudhury" userId="a37f0bd66b0f646b" providerId="LiveId" clId="{A842B4DD-A98C-4F8B-ABDD-DBD806F9E0F9}" dt="2026-05-01T16:02:21.218" v="155" actId="207"/>
+            <ac:spMkLst>
+              <pc:docMk/>
+              <pc:sldMasterMk cId="0" sldId="2147483648"/>
+              <pc:sldLayoutMk cId="0" sldId="2147483657"/>
+              <ac:spMk id="6" creationId="{B6F5D0D5-C850-72E1-23BE-9F459C7FCBA3}"/>
+            </ac:spMkLst>
+          </pc:spChg>
+          <pc:spChg chg="mod">
+            <ac:chgData name="Sajid Choudhury" userId="a37f0bd66b0f646b" providerId="LiveId" clId="{A842B4DD-A98C-4F8B-ABDD-DBD806F9E0F9}" dt="2026-05-01T16:02:21.218" v="155" actId="207"/>
+            <ac:spMkLst>
+              <pc:docMk/>
+              <pc:sldMasterMk cId="0" sldId="2147483648"/>
+              <pc:sldLayoutMk cId="0" sldId="2147483657"/>
+              <ac:spMk id="7" creationId="{7F1EEEBE-4B47-9048-E0F9-1EB115517FA6}"/>
+            </ac:spMkLst>
+          </pc:spChg>
+        </pc:sldLayoutChg>
+        <pc:sldLayoutChg chg="modSp">
+          <pc:chgData name="Sajid Choudhury" userId="a37f0bd66b0f646b" providerId="LiveId" clId="{A842B4DD-A98C-4F8B-ABDD-DBD806F9E0F9}" dt="2026-05-01T16:04:36.885" v="195" actId="404"/>
+          <pc:sldLayoutMkLst>
+            <pc:docMk/>
+            <pc:sldMasterMk cId="0" sldId="2147483648"/>
+            <pc:sldLayoutMk cId="0" sldId="2147483658"/>
+          </pc:sldLayoutMkLst>
+          <pc:spChg chg="mod">
+            <ac:chgData name="Sajid Choudhury" userId="a37f0bd66b0f646b" providerId="LiveId" clId="{A842B4DD-A98C-4F8B-ABDD-DBD806F9E0F9}" dt="2026-05-01T16:02:25.944" v="156" actId="207"/>
+            <ac:spMkLst>
+              <pc:docMk/>
+              <pc:sldMasterMk cId="0" sldId="2147483648"/>
+              <pc:sldLayoutMk cId="0" sldId="2147483658"/>
+              <ac:spMk id="5" creationId="{3A2525D3-FBA4-83D1-0F31-6D6F005E721F}"/>
+            </ac:spMkLst>
+          </pc:spChg>
+          <pc:spChg chg="mod">
+            <ac:chgData name="Sajid Choudhury" userId="a37f0bd66b0f646b" providerId="LiveId" clId="{A842B4DD-A98C-4F8B-ABDD-DBD806F9E0F9}" dt="2026-05-01T16:02:25.944" v="156" actId="207"/>
+            <ac:spMkLst>
+              <pc:docMk/>
+              <pc:sldMasterMk cId="0" sldId="2147483648"/>
+              <pc:sldLayoutMk cId="0" sldId="2147483658"/>
+              <ac:spMk id="6" creationId="{FC14BEB9-D2F0-D9BB-0CF8-78DB078A906D}"/>
+            </ac:spMkLst>
+          </pc:spChg>
+          <pc:spChg chg="mod">
+            <ac:chgData name="Sajid Choudhury" userId="a37f0bd66b0f646b" providerId="LiveId" clId="{A842B4DD-A98C-4F8B-ABDD-DBD806F9E0F9}" dt="2026-05-01T16:02:25.944" v="156" actId="207"/>
+            <ac:spMkLst>
+              <pc:docMk/>
+              <pc:sldMasterMk cId="0" sldId="2147483648"/>
+              <pc:sldLayoutMk cId="0" sldId="2147483658"/>
+              <ac:spMk id="7" creationId="{5643AED3-294F-5CB6-9C10-8556B7AED645}"/>
+            </ac:spMkLst>
+          </pc:spChg>
+          <pc:spChg chg="mod">
+            <ac:chgData name="Sajid Choudhury" userId="a37f0bd66b0f646b" providerId="LiveId" clId="{A842B4DD-A98C-4F8B-ABDD-DBD806F9E0F9}" dt="2026-05-01T16:04:36.885" v="195" actId="404"/>
+            <ac:spMkLst>
+              <pc:docMk/>
+              <pc:sldMasterMk cId="0" sldId="2147483648"/>
+              <pc:sldLayoutMk cId="0" sldId="2147483658"/>
+              <ac:spMk id="89" creationId="{00000000-0000-0000-0000-000000000000}"/>
+            </ac:spMkLst>
+          </pc:spChg>
+          <pc:spChg chg="mod">
+            <ac:chgData name="Sajid Choudhury" userId="a37f0bd66b0f646b" providerId="LiveId" clId="{A842B4DD-A98C-4F8B-ABDD-DBD806F9E0F9}" dt="2026-05-01T16:03:42.441" v="175" actId="404"/>
+            <ac:spMkLst>
+              <pc:docMk/>
+              <pc:sldMasterMk cId="0" sldId="2147483648"/>
+              <pc:sldLayoutMk cId="0" sldId="2147483658"/>
+              <ac:spMk id="93" creationId="{00000000-0000-0000-0000-000000000000}"/>
+            </ac:spMkLst>
+          </pc:spChg>
+          <pc:spChg chg="mod">
+            <ac:chgData name="Sajid Choudhury" userId="a37f0bd66b0f646b" providerId="LiveId" clId="{A842B4DD-A98C-4F8B-ABDD-DBD806F9E0F9}" dt="2026-05-01T16:03:46.035" v="177" actId="404"/>
+            <ac:spMkLst>
+              <pc:docMk/>
+              <pc:sldMasterMk cId="0" sldId="2147483648"/>
+              <pc:sldLayoutMk cId="0" sldId="2147483658"/>
+              <ac:spMk id="94" creationId="{00000000-0000-0000-0000-000000000000}"/>
+            </ac:spMkLst>
+          </pc:spChg>
+          <pc:spChg chg="mod">
+            <ac:chgData name="Sajid Choudhury" userId="a37f0bd66b0f646b" providerId="LiveId" clId="{A842B4DD-A98C-4F8B-ABDD-DBD806F9E0F9}" dt="2026-05-01T16:03:51.226" v="180" actId="403"/>
+            <ac:spMkLst>
+              <pc:docMk/>
+              <pc:sldMasterMk cId="0" sldId="2147483648"/>
+              <pc:sldLayoutMk cId="0" sldId="2147483658"/>
+              <ac:spMk id="95" creationId="{00000000-0000-0000-0000-000000000000}"/>
+            </ac:spMkLst>
+          </pc:spChg>
+          <pc:spChg chg="mod">
+            <ac:chgData name="Sajid Choudhury" userId="a37f0bd66b0f646b" providerId="LiveId" clId="{A842B4DD-A98C-4F8B-ABDD-DBD806F9E0F9}" dt="2026-05-01T16:03:54.436" v="181" actId="404"/>
+            <ac:spMkLst>
+              <pc:docMk/>
+              <pc:sldMasterMk cId="0" sldId="2147483648"/>
+              <pc:sldLayoutMk cId="0" sldId="2147483658"/>
+              <ac:spMk id="96" creationId="{00000000-0000-0000-0000-000000000000}"/>
+            </ac:spMkLst>
+          </pc:spChg>
+        </pc:sldLayoutChg>
+        <pc:sldLayoutChg chg="modSp">
+          <pc:chgData name="Sajid Choudhury" userId="a37f0bd66b0f646b" providerId="LiveId" clId="{A842B4DD-A98C-4F8B-ABDD-DBD806F9E0F9}" dt="2026-05-01T16:04:46.988" v="200" actId="403"/>
+          <pc:sldLayoutMkLst>
+            <pc:docMk/>
+            <pc:sldMasterMk cId="0" sldId="2147483648"/>
+            <pc:sldLayoutMk cId="0" sldId="2147483659"/>
+          </pc:sldLayoutMkLst>
+          <pc:spChg chg="mod">
+            <ac:chgData name="Sajid Choudhury" userId="a37f0bd66b0f646b" providerId="LiveId" clId="{A842B4DD-A98C-4F8B-ABDD-DBD806F9E0F9}" dt="2026-05-01T16:02:30.262" v="157" actId="207"/>
+            <ac:spMkLst>
+              <pc:docMk/>
+              <pc:sldMasterMk cId="0" sldId="2147483648"/>
+              <pc:sldLayoutMk cId="0" sldId="2147483659"/>
+              <ac:spMk id="5" creationId="{21B68C92-40FC-1C70-4AAB-F670ECE5822A}"/>
+            </ac:spMkLst>
+          </pc:spChg>
+          <pc:spChg chg="mod">
+            <ac:chgData name="Sajid Choudhury" userId="a37f0bd66b0f646b" providerId="LiveId" clId="{A842B4DD-A98C-4F8B-ABDD-DBD806F9E0F9}" dt="2026-05-01T16:02:30.262" v="157" actId="207"/>
+            <ac:spMkLst>
+              <pc:docMk/>
+              <pc:sldMasterMk cId="0" sldId="2147483648"/>
+              <pc:sldLayoutMk cId="0" sldId="2147483659"/>
+              <ac:spMk id="6" creationId="{B5D6329E-0214-C925-C2A9-1CB7DE25FE7F}"/>
+            </ac:spMkLst>
+          </pc:spChg>
+          <pc:spChg chg="mod">
+            <ac:chgData name="Sajid Choudhury" userId="a37f0bd66b0f646b" providerId="LiveId" clId="{A842B4DD-A98C-4F8B-ABDD-DBD806F9E0F9}" dt="2026-05-01T16:02:30.262" v="157" actId="207"/>
+            <ac:spMkLst>
+              <pc:docMk/>
+              <pc:sldMasterMk cId="0" sldId="2147483648"/>
+              <pc:sldLayoutMk cId="0" sldId="2147483659"/>
+              <ac:spMk id="7" creationId="{B6699144-B16E-0261-C3C9-DF02E1B82CC9}"/>
+            </ac:spMkLst>
+          </pc:spChg>
+          <pc:spChg chg="mod">
+            <ac:chgData name="Sajid Choudhury" userId="a37f0bd66b0f646b" providerId="LiveId" clId="{A842B4DD-A98C-4F8B-ABDD-DBD806F9E0F9}" dt="2026-05-01T16:04:43.586" v="197" actId="404"/>
+            <ac:spMkLst>
+              <pc:docMk/>
+              <pc:sldMasterMk cId="0" sldId="2147483648"/>
+              <pc:sldLayoutMk cId="0" sldId="2147483659"/>
+              <ac:spMk id="99" creationId="{00000000-0000-0000-0000-000000000000}"/>
+            </ac:spMkLst>
+          </pc:spChg>
+          <pc:spChg chg="mod">
+            <ac:chgData name="Sajid Choudhury" userId="a37f0bd66b0f646b" providerId="LiveId" clId="{A842B4DD-A98C-4F8B-ABDD-DBD806F9E0F9}" dt="2026-05-01T16:04:46.988" v="200" actId="403"/>
+            <ac:spMkLst>
+              <pc:docMk/>
+              <pc:sldMasterMk cId="0" sldId="2147483648"/>
+              <pc:sldLayoutMk cId="0" sldId="2147483659"/>
+              <ac:spMk id="100" creationId="{00000000-0000-0000-0000-000000000000}"/>
+            </ac:spMkLst>
+          </pc:spChg>
+        </pc:sldLayoutChg>
+        <pc:sldLayoutChg chg="modSp">
+          <pc:chgData name="Sajid Choudhury" userId="a37f0bd66b0f646b" providerId="LiveId" clId="{A842B4DD-A98C-4F8B-ABDD-DBD806F9E0F9}" dt="2026-05-01T16:04:51.269" v="202" actId="404"/>
+          <pc:sldLayoutMkLst>
+            <pc:docMk/>
+            <pc:sldMasterMk cId="0" sldId="2147483648"/>
+            <pc:sldLayoutMk cId="0" sldId="2147483660"/>
+          </pc:sldLayoutMkLst>
+          <pc:spChg chg="mod">
+            <ac:chgData name="Sajid Choudhury" userId="a37f0bd66b0f646b" providerId="LiveId" clId="{A842B4DD-A98C-4F8B-ABDD-DBD806F9E0F9}" dt="2026-05-01T16:02:34.481" v="158" actId="207"/>
+            <ac:spMkLst>
+              <pc:docMk/>
+              <pc:sldMasterMk cId="0" sldId="2147483648"/>
+              <pc:sldLayoutMk cId="0" sldId="2147483660"/>
+              <ac:spMk id="5" creationId="{06C5A62E-9F6E-6E96-77F8-0C1577AC76C9}"/>
+            </ac:spMkLst>
+          </pc:spChg>
+          <pc:spChg chg="mod">
+            <ac:chgData name="Sajid Choudhury" userId="a37f0bd66b0f646b" providerId="LiveId" clId="{A842B4DD-A98C-4F8B-ABDD-DBD806F9E0F9}" dt="2026-05-01T16:02:34.481" v="158" actId="207"/>
+            <ac:spMkLst>
+              <pc:docMk/>
+              <pc:sldMasterMk cId="0" sldId="2147483648"/>
+              <pc:sldLayoutMk cId="0" sldId="2147483660"/>
+              <ac:spMk id="6" creationId="{943E9AB6-B58A-FE59-6B9F-33CF2A730CAE}"/>
+            </ac:spMkLst>
+          </pc:spChg>
+          <pc:spChg chg="mod">
+            <ac:chgData name="Sajid Choudhury" userId="a37f0bd66b0f646b" providerId="LiveId" clId="{A842B4DD-A98C-4F8B-ABDD-DBD806F9E0F9}" dt="2026-05-01T16:02:34.481" v="158" actId="207"/>
+            <ac:spMkLst>
+              <pc:docMk/>
+              <pc:sldMasterMk cId="0" sldId="2147483648"/>
+              <pc:sldLayoutMk cId="0" sldId="2147483660"/>
+              <ac:spMk id="7" creationId="{1FC4A2AA-D477-9DB5-5172-1CBACCF0D6BA}"/>
+            </ac:spMkLst>
+          </pc:spChg>
+          <pc:spChg chg="mod">
+            <ac:chgData name="Sajid Choudhury" userId="a37f0bd66b0f646b" providerId="LiveId" clId="{A842B4DD-A98C-4F8B-ABDD-DBD806F9E0F9}" dt="2026-05-01T16:04:51.269" v="202" actId="404"/>
+            <ac:spMkLst>
+              <pc:docMk/>
+              <pc:sldMasterMk cId="0" sldId="2147483648"/>
+              <pc:sldLayoutMk cId="0" sldId="2147483660"/>
+              <ac:spMk id="107" creationId="{00000000-0000-0000-0000-000000000000}"/>
+            </ac:spMkLst>
+          </pc:spChg>
+        </pc:sldLayoutChg>
+        <pc:sldLayoutChg chg="modSp">
+          <pc:chgData name="Sajid Choudhury" userId="a37f0bd66b0f646b" providerId="LiveId" clId="{A842B4DD-A98C-4F8B-ABDD-DBD806F9E0F9}" dt="2026-05-01T16:04:57.151" v="205" actId="404"/>
+          <pc:sldLayoutMkLst>
+            <pc:docMk/>
+            <pc:sldMasterMk cId="0" sldId="2147483648"/>
+            <pc:sldLayoutMk cId="0" sldId="2147483661"/>
+          </pc:sldLayoutMkLst>
+          <pc:spChg chg="mod">
+            <ac:chgData name="Sajid Choudhury" userId="a37f0bd66b0f646b" providerId="LiveId" clId="{A842B4DD-A98C-4F8B-ABDD-DBD806F9E0F9}" dt="2026-05-01T16:02:40.321" v="159" actId="207"/>
+            <ac:spMkLst>
+              <pc:docMk/>
+              <pc:sldMasterMk cId="0" sldId="2147483648"/>
+              <pc:sldLayoutMk cId="0" sldId="2147483661"/>
+              <ac:spMk id="3" creationId="{0D638106-9A1A-4D2A-8808-0D5B934C22D9}"/>
+            </ac:spMkLst>
+          </pc:spChg>
+          <pc:spChg chg="mod">
+            <ac:chgData name="Sajid Choudhury" userId="a37f0bd66b0f646b" providerId="LiveId" clId="{A842B4DD-A98C-4F8B-ABDD-DBD806F9E0F9}" dt="2026-05-01T16:02:40.321" v="159" actId="207"/>
+            <ac:spMkLst>
+              <pc:docMk/>
+              <pc:sldMasterMk cId="0" sldId="2147483648"/>
+              <pc:sldLayoutMk cId="0" sldId="2147483661"/>
+              <ac:spMk id="4" creationId="{E67D3D7E-3DF1-AEA6-B0CA-277758F88ADB}"/>
+            </ac:spMkLst>
+          </pc:spChg>
+          <pc:spChg chg="mod">
+            <ac:chgData name="Sajid Choudhury" userId="a37f0bd66b0f646b" providerId="LiveId" clId="{A842B4DD-A98C-4F8B-ABDD-DBD806F9E0F9}" dt="2026-05-01T16:04:54.812" v="204" actId="404"/>
+            <ac:spMkLst>
+              <pc:docMk/>
+              <pc:sldMasterMk cId="0" sldId="2147483648"/>
+              <pc:sldLayoutMk cId="0" sldId="2147483661"/>
+              <ac:spMk id="114" creationId="{00000000-0000-0000-0000-000000000000}"/>
+            </ac:spMkLst>
+          </pc:spChg>
+          <pc:spChg chg="mod">
+            <ac:chgData name="Sajid Choudhury" userId="a37f0bd66b0f646b" providerId="LiveId" clId="{A842B4DD-A98C-4F8B-ABDD-DBD806F9E0F9}" dt="2026-05-01T16:02:40.321" v="159" actId="207"/>
+            <ac:spMkLst>
+              <pc:docMk/>
+              <pc:sldMasterMk cId="0" sldId="2147483648"/>
+              <pc:sldLayoutMk cId="0" sldId="2147483661"/>
+              <ac:spMk id="117" creationId="{00000000-0000-0000-0000-000000000000}"/>
+            </ac:spMkLst>
+          </pc:spChg>
+          <pc:spChg chg="mod">
+            <ac:chgData name="Sajid Choudhury" userId="a37f0bd66b0f646b" providerId="LiveId" clId="{A842B4DD-A98C-4F8B-ABDD-DBD806F9E0F9}" dt="2026-05-01T16:04:57.151" v="205" actId="404"/>
+            <ac:spMkLst>
+              <pc:docMk/>
+              <pc:sldMasterMk cId="0" sldId="2147483648"/>
+              <pc:sldLayoutMk cId="0" sldId="2147483661"/>
+              <ac:spMk id="118" creationId="{00000000-0000-0000-0000-000000000000}"/>
+            </ac:spMkLst>
+          </pc:spChg>
+          <pc:spChg chg="mod">
+            <ac:chgData name="Sajid Choudhury" userId="a37f0bd66b0f646b" providerId="LiveId" clId="{A842B4DD-A98C-4F8B-ABDD-DBD806F9E0F9}" dt="2026-05-01T16:04:57.151" v="205" actId="404"/>
+            <ac:spMkLst>
+              <pc:docMk/>
+              <pc:sldMasterMk cId="0" sldId="2147483648"/>
+              <pc:sldLayoutMk cId="0" sldId="2147483661"/>
+              <ac:spMk id="119" creationId="{00000000-0000-0000-0000-000000000000}"/>
+            </ac:spMkLst>
+          </pc:spChg>
+        </pc:sldLayoutChg>
+        <pc:sldLayoutChg chg="modSp">
+          <pc:chgData name="Sajid Choudhury" userId="a37f0bd66b0f646b" providerId="LiveId" clId="{A842B4DD-A98C-4F8B-ABDD-DBD806F9E0F9}" dt="2026-05-01T16:05:04.797" v="208" actId="404"/>
+          <pc:sldLayoutMkLst>
+            <pc:docMk/>
+            <pc:sldMasterMk cId="0" sldId="2147483648"/>
+            <pc:sldLayoutMk cId="0" sldId="2147483663"/>
+          </pc:sldLayoutMkLst>
+          <pc:spChg chg="mod">
+            <ac:chgData name="Sajid Choudhury" userId="a37f0bd66b0f646b" providerId="LiveId" clId="{A842B4DD-A98C-4F8B-ABDD-DBD806F9E0F9}" dt="2026-05-01T16:02:44.248" v="160" actId="207"/>
+            <ac:spMkLst>
+              <pc:docMk/>
+              <pc:sldMasterMk cId="0" sldId="2147483648"/>
+              <pc:sldLayoutMk cId="0" sldId="2147483663"/>
+              <ac:spMk id="6" creationId="{B7E0E315-4224-6904-77E7-A8C9872352FC}"/>
+            </ac:spMkLst>
+          </pc:spChg>
+          <pc:spChg chg="mod">
+            <ac:chgData name="Sajid Choudhury" userId="a37f0bd66b0f646b" providerId="LiveId" clId="{A842B4DD-A98C-4F8B-ABDD-DBD806F9E0F9}" dt="2026-05-01T16:02:44.248" v="160" actId="207"/>
+            <ac:spMkLst>
+              <pc:docMk/>
+              <pc:sldMasterMk cId="0" sldId="2147483648"/>
+              <pc:sldLayoutMk cId="0" sldId="2147483663"/>
+              <ac:spMk id="7" creationId="{6FDF93AB-3FD7-D38C-53ED-D78773BA3941}"/>
+            </ac:spMkLst>
+          </pc:spChg>
+          <pc:spChg chg="mod">
+            <ac:chgData name="Sajid Choudhury" userId="a37f0bd66b0f646b" providerId="LiveId" clId="{A842B4DD-A98C-4F8B-ABDD-DBD806F9E0F9}" dt="2026-05-01T16:02:44.248" v="160" actId="207"/>
+            <ac:spMkLst>
+              <pc:docMk/>
+              <pc:sldMasterMk cId="0" sldId="2147483648"/>
+              <pc:sldLayoutMk cId="0" sldId="2147483663"/>
+              <ac:spMk id="8" creationId="{862F9145-CD30-5CC7-104D-46FFD3D27B4C}"/>
+            </ac:spMkLst>
+          </pc:spChg>
+          <pc:spChg chg="mod">
+            <ac:chgData name="Sajid Choudhury" userId="a37f0bd66b0f646b" providerId="LiveId" clId="{A842B4DD-A98C-4F8B-ABDD-DBD806F9E0F9}" dt="2026-05-01T16:05:01.910" v="207" actId="404"/>
+            <ac:spMkLst>
+              <pc:docMk/>
+              <pc:sldMasterMk cId="0" sldId="2147483648"/>
+              <pc:sldLayoutMk cId="0" sldId="2147483663"/>
+              <ac:spMk id="129" creationId="{00000000-0000-0000-0000-000000000000}"/>
+            </ac:spMkLst>
+          </pc:spChg>
+          <pc:spChg chg="mod">
+            <ac:chgData name="Sajid Choudhury" userId="a37f0bd66b0f646b" providerId="LiveId" clId="{A842B4DD-A98C-4F8B-ABDD-DBD806F9E0F9}" dt="2026-05-01T16:05:04.797" v="208" actId="404"/>
+            <ac:spMkLst>
+              <pc:docMk/>
+              <pc:sldMasterMk cId="0" sldId="2147483648"/>
+              <pc:sldLayoutMk cId="0" sldId="2147483663"/>
+              <ac:spMk id="135" creationId="{00000000-0000-0000-0000-000000000000}"/>
+            </ac:spMkLst>
+          </pc:spChg>
+          <pc:spChg chg="mod">
+            <ac:chgData name="Sajid Choudhury" userId="a37f0bd66b0f646b" providerId="LiveId" clId="{A842B4DD-A98C-4F8B-ABDD-DBD806F9E0F9}" dt="2026-05-01T16:05:04.797" v="208" actId="404"/>
+            <ac:spMkLst>
+              <pc:docMk/>
+              <pc:sldMasterMk cId="0" sldId="2147483648"/>
+              <pc:sldLayoutMk cId="0" sldId="2147483663"/>
+              <ac:spMk id="136" creationId="{00000000-0000-0000-0000-000000000000}"/>
+            </ac:spMkLst>
+          </pc:spChg>
+        </pc:sldLayoutChg>
+        <pc:sldLayoutChg chg="modSp">
+          <pc:chgData name="Sajid Choudhury" userId="a37f0bd66b0f646b" providerId="LiveId" clId="{A842B4DD-A98C-4F8B-ABDD-DBD806F9E0F9}" dt="2026-05-01T16:05:13.319" v="213" actId="403"/>
+          <pc:sldLayoutMkLst>
+            <pc:docMk/>
+            <pc:sldMasterMk cId="0" sldId="2147483648"/>
+            <pc:sldLayoutMk cId="1017519997" sldId="2147483664"/>
+          </pc:sldLayoutMkLst>
+          <pc:spChg chg="mod">
+            <ac:chgData name="Sajid Choudhury" userId="a37f0bd66b0f646b" providerId="LiveId" clId="{A842B4DD-A98C-4F8B-ABDD-DBD806F9E0F9}" dt="2026-05-01T16:02:47.678" v="161" actId="207"/>
+            <ac:spMkLst>
+              <pc:docMk/>
+              <pc:sldMasterMk cId="0" sldId="2147483648"/>
+              <pc:sldLayoutMk cId="1017519997" sldId="2147483664"/>
+              <ac:spMk id="3" creationId="{17B1D238-3489-CC38-CF2C-252D0221F151}"/>
+            </ac:spMkLst>
+          </pc:spChg>
+          <pc:spChg chg="mod">
+            <ac:chgData name="Sajid Choudhury" userId="a37f0bd66b0f646b" providerId="LiveId" clId="{A842B4DD-A98C-4F8B-ABDD-DBD806F9E0F9}" dt="2026-05-01T16:02:47.678" v="161" actId="207"/>
+            <ac:spMkLst>
+              <pc:docMk/>
+              <pc:sldMasterMk cId="0" sldId="2147483648"/>
+              <pc:sldLayoutMk cId="1017519997" sldId="2147483664"/>
+              <ac:spMk id="4" creationId="{CC0D9BF6-097D-4986-B72E-3138FEEBE8A6}"/>
+            </ac:spMkLst>
+          </pc:spChg>
+          <pc:spChg chg="mod">
+            <ac:chgData name="Sajid Choudhury" userId="a37f0bd66b0f646b" providerId="LiveId" clId="{A842B4DD-A98C-4F8B-ABDD-DBD806F9E0F9}" dt="2026-05-01T16:02:47.678" v="161" actId="207"/>
+            <ac:spMkLst>
+              <pc:docMk/>
+              <pc:sldMasterMk cId="0" sldId="2147483648"/>
+              <pc:sldLayoutMk cId="1017519997" sldId="2147483664"/>
+              <ac:spMk id="5" creationId="{923E56AD-0C3B-2C1F-5C45-2E17E064B074}"/>
+            </ac:spMkLst>
+          </pc:spChg>
+          <pc:spChg chg="mod">
+            <ac:chgData name="Sajid Choudhury" userId="a37f0bd66b0f646b" providerId="LiveId" clId="{A842B4DD-A98C-4F8B-ABDD-DBD806F9E0F9}" dt="2026-05-01T16:05:09.757" v="210" actId="404"/>
+            <ac:spMkLst>
+              <pc:docMk/>
+              <pc:sldMasterMk cId="0" sldId="2147483648"/>
+              <pc:sldLayoutMk cId="1017519997" sldId="2147483664"/>
+              <ac:spMk id="64" creationId="{00000000-0000-0000-0000-000000000000}"/>
+            </ac:spMkLst>
+          </pc:spChg>
+          <pc:spChg chg="mod">
+            <ac:chgData name="Sajid Choudhury" userId="a37f0bd66b0f646b" providerId="LiveId" clId="{A842B4DD-A98C-4F8B-ABDD-DBD806F9E0F9}" dt="2026-05-01T16:05:13.319" v="213" actId="403"/>
+            <ac:spMkLst>
+              <pc:docMk/>
+              <pc:sldMasterMk cId="0" sldId="2147483648"/>
+              <pc:sldLayoutMk cId="1017519997" sldId="2147483664"/>
+              <ac:spMk id="65" creationId="{00000000-0000-0000-0000-000000000000}"/>
+            </ac:spMkLst>
+          </pc:spChg>
+        </pc:sldLayoutChg>
+        <pc:sldLayoutChg chg="modSp mod">
+          <pc:chgData name="Sajid Choudhury" userId="a37f0bd66b0f646b" providerId="LiveId" clId="{A842B4DD-A98C-4F8B-ABDD-DBD806F9E0F9}" dt="2026-05-01T16:05:26.455" v="217" actId="404"/>
+          <pc:sldLayoutMkLst>
+            <pc:docMk/>
+            <pc:sldMasterMk cId="0" sldId="2147483648"/>
+            <pc:sldLayoutMk cId="1395571683" sldId="2147483665"/>
+          </pc:sldLayoutMkLst>
+          <pc:spChg chg="mod">
+            <ac:chgData name="Sajid Choudhury" userId="a37f0bd66b0f646b" providerId="LiveId" clId="{A842B4DD-A98C-4F8B-ABDD-DBD806F9E0F9}" dt="2026-05-01T16:05:26.455" v="217" actId="404"/>
+            <ac:spMkLst>
+              <pc:docMk/>
+              <pc:sldMasterMk cId="0" sldId="2147483648"/>
+              <pc:sldLayoutMk cId="1395571683" sldId="2147483665"/>
+              <ac:spMk id="2" creationId="{FF369B13-A68D-45F1-BC5F-50E260DA3E54}"/>
+            </ac:spMkLst>
+          </pc:spChg>
+          <pc:spChg chg="mod">
+            <ac:chgData name="Sajid Choudhury" userId="a37f0bd66b0f646b" providerId="LiveId" clId="{A842B4DD-A98C-4F8B-ABDD-DBD806F9E0F9}" dt="2026-05-01T16:05:23.767" v="215" actId="1076"/>
+            <ac:spMkLst>
+              <pc:docMk/>
+              <pc:sldMasterMk cId="0" sldId="2147483648"/>
+              <pc:sldLayoutMk cId="1395571683" sldId="2147483665"/>
+              <ac:spMk id="3" creationId="{25D91990-12F8-4514-8C9F-4E003EF68442}"/>
+            </ac:spMkLst>
+          </pc:spChg>
+          <pc:spChg chg="mod">
+            <ac:chgData name="Sajid Choudhury" userId="a37f0bd66b0f646b" providerId="LiveId" clId="{A842B4DD-A98C-4F8B-ABDD-DBD806F9E0F9}" dt="2026-05-01T16:05:23.767" v="215" actId="1076"/>
+            <ac:spMkLst>
+              <pc:docMk/>
+              <pc:sldMasterMk cId="0" sldId="2147483648"/>
+              <pc:sldLayoutMk cId="1395571683" sldId="2147483665"/>
+              <ac:spMk id="4" creationId="{096F3C4C-0E10-4328-8CBC-8D8B3F5453F0}"/>
+            </ac:spMkLst>
+          </pc:spChg>
+          <pc:spChg chg="mod">
+            <ac:chgData name="Sajid Choudhury" userId="a37f0bd66b0f646b" providerId="LiveId" clId="{A842B4DD-A98C-4F8B-ABDD-DBD806F9E0F9}" dt="2026-05-01T16:02:52.911" v="162" actId="207"/>
+            <ac:spMkLst>
+              <pc:docMk/>
+              <pc:sldMasterMk cId="0" sldId="2147483648"/>
+              <pc:sldLayoutMk cId="1395571683" sldId="2147483665"/>
+              <ac:spMk id="5" creationId="{8A7240A8-F8A7-10CE-039E-359EABE90441}"/>
+            </ac:spMkLst>
+          </pc:spChg>
+          <pc:spChg chg="mod">
+            <ac:chgData name="Sajid Choudhury" userId="a37f0bd66b0f646b" providerId="LiveId" clId="{A842B4DD-A98C-4F8B-ABDD-DBD806F9E0F9}" dt="2026-05-01T16:02:52.911" v="162" actId="207"/>
+            <ac:spMkLst>
+              <pc:docMk/>
+              <pc:sldMasterMk cId="0" sldId="2147483648"/>
+              <pc:sldLayoutMk cId="1395571683" sldId="2147483665"/>
+              <ac:spMk id="6" creationId="{243CF280-AFA4-292D-DABF-FE1AD1C9A6C3}"/>
+            </ac:spMkLst>
+          </pc:spChg>
+          <pc:spChg chg="mod">
+            <ac:chgData name="Sajid Choudhury" userId="a37f0bd66b0f646b" providerId="LiveId" clId="{A842B4DD-A98C-4F8B-ABDD-DBD806F9E0F9}" dt="2026-05-01T16:02:52.911" v="162" actId="207"/>
+            <ac:spMkLst>
+              <pc:docMk/>
+              <pc:sldMasterMk cId="0" sldId="2147483648"/>
+              <pc:sldLayoutMk cId="1395571683" sldId="2147483665"/>
+              <ac:spMk id="8" creationId="{0BE628F1-63A8-FD33-41D6-26282BBB607D}"/>
+            </ac:spMkLst>
+          </pc:spChg>
+        </pc:sldLayoutChg>
+        <pc:sldLayoutChg chg="modSp">
+          <pc:chgData name="Sajid Choudhury" userId="a37f0bd66b0f646b" providerId="LiveId" clId="{A842B4DD-A98C-4F8B-ABDD-DBD806F9E0F9}" dt="2026-05-01T16:05:29.797" v="220" actId="404"/>
+          <pc:sldLayoutMkLst>
+            <pc:docMk/>
+            <pc:sldMasterMk cId="0" sldId="2147483648"/>
+            <pc:sldLayoutMk cId="1179569444" sldId="2147483666"/>
+          </pc:sldLayoutMkLst>
+          <pc:spChg chg="mod">
+            <ac:chgData name="Sajid Choudhury" userId="a37f0bd66b0f646b" providerId="LiveId" clId="{A842B4DD-A98C-4F8B-ABDD-DBD806F9E0F9}" dt="2026-05-01T16:05:29.797" v="220" actId="404"/>
+            <ac:spMkLst>
+              <pc:docMk/>
+              <pc:sldMasterMk cId="0" sldId="2147483648"/>
+              <pc:sldLayoutMk cId="1179569444" sldId="2147483666"/>
+              <ac:spMk id="2" creationId="{5FFA6807-F8DC-437D-9D2F-D1043BA7158A}"/>
+            </ac:spMkLst>
+          </pc:spChg>
+          <pc:spChg chg="mod">
+            <ac:chgData name="Sajid Choudhury" userId="a37f0bd66b0f646b" providerId="LiveId" clId="{A842B4DD-A98C-4F8B-ABDD-DBD806F9E0F9}" dt="2026-05-01T16:02:57.514" v="163" actId="207"/>
+            <ac:spMkLst>
+              <pc:docMk/>
+              <pc:sldMasterMk cId="0" sldId="2147483648"/>
+              <pc:sldLayoutMk cId="1179569444" sldId="2147483666"/>
+              <ac:spMk id="7" creationId="{8076C502-530D-A5D0-CB74-BF189876C8D9}"/>
+            </ac:spMkLst>
+          </pc:spChg>
+          <pc:spChg chg="mod">
+            <ac:chgData name="Sajid Choudhury" userId="a37f0bd66b0f646b" providerId="LiveId" clId="{A842B4DD-A98C-4F8B-ABDD-DBD806F9E0F9}" dt="2026-05-01T16:02:57.514" v="163" actId="207"/>
+            <ac:spMkLst>
+              <pc:docMk/>
+              <pc:sldMasterMk cId="0" sldId="2147483648"/>
+              <pc:sldLayoutMk cId="1179569444" sldId="2147483666"/>
+              <ac:spMk id="8" creationId="{5D1F1ECC-F7A6-C6DD-DA2D-F843E80C4797}"/>
+            </ac:spMkLst>
+          </pc:spChg>
+          <pc:spChg chg="mod">
+            <ac:chgData name="Sajid Choudhury" userId="a37f0bd66b0f646b" providerId="LiveId" clId="{A842B4DD-A98C-4F8B-ABDD-DBD806F9E0F9}" dt="2026-05-01T16:02:57.514" v="163" actId="207"/>
+            <ac:spMkLst>
+              <pc:docMk/>
+              <pc:sldMasterMk cId="0" sldId="2147483648"/>
+              <pc:sldLayoutMk cId="1179569444" sldId="2147483666"/>
+              <ac:spMk id="9" creationId="{63D2D22B-2D0F-716A-BD62-A828ADE4924E}"/>
+            </ac:spMkLst>
+          </pc:spChg>
+        </pc:sldLayoutChg>
+        <pc:sldLayoutChg chg="modSp">
+          <pc:chgData name="Sajid Choudhury" userId="a37f0bd66b0f646b" providerId="LiveId" clId="{A842B4DD-A98C-4F8B-ABDD-DBD806F9E0F9}" dt="2026-05-01T16:05:32.754" v="222" actId="404"/>
+          <pc:sldLayoutMkLst>
+            <pc:docMk/>
+            <pc:sldMasterMk cId="0" sldId="2147483648"/>
+            <pc:sldLayoutMk cId="685580519" sldId="2147483686"/>
+          </pc:sldLayoutMkLst>
+          <pc:spChg chg="mod">
+            <ac:chgData name="Sajid Choudhury" userId="a37f0bd66b0f646b" providerId="LiveId" clId="{A842B4DD-A98C-4F8B-ABDD-DBD806F9E0F9}" dt="2026-05-01T16:03:01.347" v="164" actId="207"/>
+            <ac:spMkLst>
+              <pc:docMk/>
+              <pc:sldMasterMk cId="0" sldId="2147483648"/>
+              <pc:sldLayoutMk cId="685580519" sldId="2147483686"/>
+              <ac:spMk id="5" creationId="{19C29DAE-0F3F-0524-BC54-F92FA43A20EB}"/>
+            </ac:spMkLst>
+          </pc:spChg>
+          <pc:spChg chg="mod">
+            <ac:chgData name="Sajid Choudhury" userId="a37f0bd66b0f646b" providerId="LiveId" clId="{A842B4DD-A98C-4F8B-ABDD-DBD806F9E0F9}" dt="2026-05-01T16:05:32.754" v="222" actId="404"/>
+            <ac:spMkLst>
+              <pc:docMk/>
+              <pc:sldMasterMk cId="0" sldId="2147483648"/>
+              <pc:sldLayoutMk cId="685580519" sldId="2147483686"/>
+              <ac:spMk id="23" creationId="{00000000-0000-0000-0000-000000000000}"/>
+            </ac:spMkLst>
+          </pc:spChg>
+        </pc:sldLayoutChg>
+      </pc:sldMasterChg>
+    </pc:docChg>
+  </pc:docChgLst>
+</pc:chgInfo>
 </file>
 
 <file path=ppt/notesMasters/notesMaster1.xml><?xml version="1.0" encoding="utf-8"?>
@@ -2536,7 +3639,7 @@
 </file>
 
 <file path=ppt/slideLayouts/slideLayout1.xml><?xml version="1.0" encoding="utf-8"?>
-<p:sldLayout xmlns:a="http://schemas.openxmlformats.org/drawingml/2006/main" xmlns:r="http://schemas.openxmlformats.org/officeDocument/2006/relationships" xmlns:p="http://schemas.openxmlformats.org/presentationml/2006/main" matchingName="Title Slide">
+<p:sldLayout xmlns:a="http://schemas.openxmlformats.org/drawingml/2006/main" xmlns:r="http://schemas.openxmlformats.org/officeDocument/2006/relationships" xmlns:p="http://schemas.openxmlformats.org/presentationml/2006/main" matchingName="Title Slide" userDrawn="1">
   <p:cSld name="Title Slide">
     <p:bg>
       <p:bgPr>
@@ -2884,7 +3987,7 @@
         </p:nvSpPr>
         <p:spPr>
           <a:xfrm>
-            <a:off x="-13494" y="6033556"/>
+            <a:off x="-13494" y="6055327"/>
             <a:ext cx="12192000" cy="824444"/>
           </a:xfrm>
           <a:prstGeom prst="rect">
@@ -2912,7 +4015,7 @@
               </a:spcAft>
               <a:buNone/>
             </a:pPr>
-            <a:endParaRPr sz="1800" b="0" i="0" u="none" strike="noStrike" cap="none">
+            <a:endParaRPr sz="1800" b="0" i="0" u="none" strike="noStrike" cap="none" dirty="0">
               <a:solidFill>
                 <a:schemeClr val="lt1"/>
               </a:solidFill>
@@ -3553,8 +4656,16 @@
           </a:lstStyle>
           <a:p>
             <a:r>
-              <a:rPr lang="en-GB"/>
-              <a:t>Optoelectronic Modulation of 2D Silicon Carbide for Tunable and Efficient White Light Emission </a:t>
+              <a:rPr lang="en-GB" dirty="0"/>
+              <a:t>Optoelectronic Modulation of 2D Silicon Carbide for </a:t>
+            </a:r>
+            <a:r>
+              <a:rPr lang="en-GB" dirty="0" err="1"/>
+              <a:t>Tunable</a:t>
+            </a:r>
+            <a:r>
+              <a:rPr lang="en-GB" dirty="0"/>
+              <a:t> and Efficient White Light Emission </a:t>
             </a:r>
             <a:endParaRPr dirty="0"/>
           </a:p>
@@ -3795,65 +4906,6 @@
           </a:p>
         </p:txBody>
       </p:sp>
-      <p:sp>
-        <p:nvSpPr>
-          <p:cNvPr id="5" name="TextBox 4">
-            <a:extLst>
-              <a:ext uri="{FF2B5EF4-FFF2-40B4-BE49-F238E27FC236}">
-                <a16:creationId xmlns:a16="http://schemas.microsoft.com/office/drawing/2014/main" id="{E4627D99-5E74-846F-2814-D16B5EFC627B}"/>
-              </a:ext>
-            </a:extLst>
-          </p:cNvPr>
-          <p:cNvSpPr txBox="1"/>
-          <p:nvPr userDrawn="1"/>
-        </p:nvSpPr>
-        <p:spPr>
-          <a:xfrm>
-            <a:off x="10461683" y="6231488"/>
-            <a:ext cx="1438214" cy="584775"/>
-          </a:xfrm>
-          <a:prstGeom prst="rect">
-            <a:avLst/>
-          </a:prstGeom>
-          <a:noFill/>
-        </p:spPr>
-        <p:txBody>
-          <a:bodyPr wrap="none" rtlCol="0">
-            <a:spAutoFit/>
-          </a:bodyPr>
-          <a:lstStyle/>
-          <a:p>
-            <a:r>
-              <a:rPr lang="en-US" sz="1800" b="1" dirty="0">
-                <a:solidFill>
-                  <a:srgbClr val="4F5368"/>
-                </a:solidFill>
-              </a:rPr>
-              <a:t>Q-PACERS</a:t>
-            </a:r>
-            <a:endParaRPr lang="en-GB" sz="1800" b="1" dirty="0">
-              <a:solidFill>
-                <a:srgbClr val="4F5368"/>
-              </a:solidFill>
-            </a:endParaRPr>
-          </a:p>
-          <a:p>
-            <a:r>
-              <a:rPr lang="en-GB" dirty="0">
-                <a:solidFill>
-                  <a:srgbClr val="4F5368"/>
-                </a:solidFill>
-              </a:rPr>
-              <a:t>sajid.buet.ac.bd</a:t>
-            </a:r>
-            <a:endParaRPr lang="en-US" dirty="0">
-              <a:solidFill>
-                <a:srgbClr val="4F5368"/>
-              </a:solidFill>
-            </a:endParaRPr>
-          </a:p>
-        </p:txBody>
-      </p:sp>
       <p:pic>
         <p:nvPicPr>
           <p:cNvPr id="7" name="Graphic 6">
@@ -3892,10 +4944,10 @@
       </p:pic>
       <p:pic>
         <p:nvPicPr>
-          <p:cNvPr id="9" name="Graphic 8">
+          <p:cNvPr id="10" name="Graphic 1">
             <a:extLst>
               <a:ext uri="{FF2B5EF4-FFF2-40B4-BE49-F238E27FC236}">
-                <a16:creationId xmlns:a16="http://schemas.microsoft.com/office/drawing/2014/main" id="{12AF1EFC-6641-F02E-AC16-9D0E97697CBB}"/>
+                <a16:creationId xmlns:a16="http://schemas.microsoft.com/office/drawing/2014/main" id="{D831AFB4-7688-8D92-6798-5C8125912625}"/>
               </a:ext>
             </a:extLst>
           </p:cNvPr>
@@ -3918,14 +4970,87 @@
         </p:blipFill>
         <p:spPr>
           <a:xfrm>
-            <a:off x="10302985" y="5010427"/>
-            <a:ext cx="1430258" cy="1319385"/>
+            <a:off x="3698534" y="5939061"/>
+            <a:ext cx="2599700" cy="644075"/>
           </a:xfrm>
           <a:prstGeom prst="rect">
             <a:avLst/>
           </a:prstGeom>
         </p:spPr>
       </p:pic>
+      <p:pic>
+        <p:nvPicPr>
+          <p:cNvPr id="11" name="Graphic 1">
+            <a:extLst>
+              <a:ext uri="{FF2B5EF4-FFF2-40B4-BE49-F238E27FC236}">
+                <a16:creationId xmlns:a16="http://schemas.microsoft.com/office/drawing/2014/main" id="{5D62FD1E-ABAD-E2F0-9469-A9C6E6F1E221}"/>
+              </a:ext>
+            </a:extLst>
+          </p:cNvPr>
+          <p:cNvPicPr>
+            <a:picLocks noChangeAspect="1"/>
+          </p:cNvPicPr>
+          <p:nvPr userDrawn="1"/>
+        </p:nvPicPr>
+        <p:blipFill>
+          <a:blip r:embed="rId8">
+            <a:extLst>
+              <a:ext uri="{96DAC541-7B7A-43D3-8B79-37D633B846F1}">
+                <asvg:svgBlip xmlns:asvg="http://schemas.microsoft.com/office/drawing/2016/SVG/main" r:embed="rId9"/>
+              </a:ext>
+            </a:extLst>
+          </a:blip>
+          <a:stretch>
+            <a:fillRect/>
+          </a:stretch>
+        </p:blipFill>
+        <p:spPr>
+          <a:xfrm>
+            <a:off x="9835122" y="4877206"/>
+            <a:ext cx="1590343" cy="1590343"/>
+          </a:xfrm>
+          <a:prstGeom prst="rect">
+            <a:avLst/>
+          </a:prstGeom>
+        </p:spPr>
+      </p:pic>
+      <p:sp>
+        <p:nvSpPr>
+          <p:cNvPr id="12" name="TextBox 11">
+            <a:extLst>
+              <a:ext uri="{FF2B5EF4-FFF2-40B4-BE49-F238E27FC236}">
+                <a16:creationId xmlns:a16="http://schemas.microsoft.com/office/drawing/2014/main" id="{AC9B43C1-7C45-9D57-CF24-73428B4A103E}"/>
+              </a:ext>
+            </a:extLst>
+          </p:cNvPr>
+          <p:cNvSpPr txBox="1"/>
+          <p:nvPr userDrawn="1"/>
+        </p:nvSpPr>
+        <p:spPr>
+          <a:xfrm>
+            <a:off x="9972231" y="6373977"/>
+            <a:ext cx="1763486" cy="338554"/>
+          </a:xfrm>
+          <a:prstGeom prst="rect">
+            <a:avLst/>
+          </a:prstGeom>
+          <a:noFill/>
+        </p:spPr>
+        <p:txBody>
+          <a:bodyPr wrap="square" rtlCol="0">
+            <a:spAutoFit/>
+          </a:bodyPr>
+          <a:lstStyle/>
+          <a:p>
+            <a:pPr rtl="0"/>
+            <a:r>
+              <a:rPr lang="en-US" sz="1600" b="1" dirty="0"/>
+              <a:t>www.sajid.bd</a:t>
+            </a:r>
+            <a:endParaRPr lang="en-GB" sz="1600" b="1" dirty="0"/>
+          </a:p>
+        </p:txBody>
+      </p:sp>
     </p:spTree>
   </p:cSld>
   <p:clrMapOvr>
@@ -3994,7 +5119,11 @@
               </a:buClr>
               <a:buSzPts val="1800"/>
               <a:buNone/>
-              <a:defRPr/>
+              <a:defRPr sz="3600">
+                <a:solidFill>
+                  <a:srgbClr val="1DA3B8"/>
+                </a:solidFill>
+              </a:defRPr>
             </a:lvl1pPr>
             <a:lvl2pPr lvl="1">
               <a:spcBef>
@@ -4086,7 +5215,7 @@
             </a:lvl9pPr>
           </a:lstStyle>
           <a:p>
-            <a:endParaRPr/>
+            <a:endParaRPr dirty="0"/>
           </a:p>
         </p:txBody>
       </p:sp>
@@ -4123,7 +5252,11 @@
                 <a:spcPts val="0"/>
               </a:spcBef>
               <a:buNone/>
-              <a:defRPr/>
+              <a:defRPr>
+                <a:solidFill>
+                  <a:srgbClr val="4F5368"/>
+                </a:solidFill>
+              </a:defRPr>
             </a:lvl1pPr>
             <a:lvl2pPr marL="0" lvl="1" indent="0" algn="r">
               <a:spcBef>
@@ -4183,20 +5316,12 @@
             </a:lvl9pPr>
           </a:lstStyle>
           <a:p>
-            <a:pPr marL="0" lvl="0" indent="0" algn="r" rtl="0">
-              <a:spcBef>
-                <a:spcPts val="0"/>
-              </a:spcBef>
-              <a:spcAft>
-                <a:spcPts val="0"/>
-              </a:spcAft>
-              <a:buNone/>
-            </a:pPr>
             <a:fld id="{00000000-1234-1234-1234-123412341234}" type="slidenum">
-              <a:rPr lang="en-US"/>
+              <a:rPr lang="en-US" smtClean="0"/>
+              <a:pPr/>
               <a:t>‹#›</a:t>
             </a:fld>
-            <a:endParaRPr dirty="0"/>
+            <a:endParaRPr lang="en-US" dirty="0"/>
           </a:p>
         </p:txBody>
       </p:sp>
@@ -4240,7 +5365,7 @@
               </a:spcAft>
               <a:buSzPts val="2800"/>
               <a:buChar char="◦"/>
-              <a:defRPr sz="2800"/>
+              <a:defRPr sz="2400"/>
             </a:lvl1pPr>
             <a:lvl2pPr marL="914400" lvl="1" indent="-381000" algn="l">
               <a:lnSpc>
@@ -4356,7 +5481,7 @@
             </a:lvl9pPr>
           </a:lstStyle>
           <a:p>
-            <a:endParaRPr/>
+            <a:endParaRPr dirty="0"/>
           </a:p>
         </p:txBody>
       </p:sp>
@@ -4400,7 +5525,7 @@
               </a:spcAft>
               <a:buSzPts val="2800"/>
               <a:buChar char="◦"/>
-              <a:defRPr sz="2800"/>
+              <a:defRPr sz="2400"/>
             </a:lvl1pPr>
             <a:lvl2pPr marL="914400" lvl="1" indent="-381000" algn="l">
               <a:lnSpc>
@@ -4565,7 +5690,7 @@
               <a:buNone/>
               <a:defRPr sz="1600" b="0" i="0" u="none" strike="noStrike" cap="none">
                 <a:solidFill>
-                  <a:schemeClr val="lt1"/>
+                  <a:srgbClr val="4F5368"/>
                 </a:solidFill>
                 <a:latin typeface="Arial Narrow"/>
                 <a:ea typeface="Arial Narrow"/>
@@ -4780,7 +5905,7 @@
               <a:buNone/>
               <a:defRPr sz="1800" b="0" i="0" u="none" strike="noStrike" cap="none">
                 <a:solidFill>
-                  <a:schemeClr val="lt1"/>
+                  <a:srgbClr val="4F5368"/>
                 </a:solidFill>
                 <a:latin typeface="Arial Narrow"/>
                 <a:ea typeface="Arial Narrow"/>
@@ -4943,18 +6068,10 @@
           </a:lstStyle>
           <a:p>
             <a:r>
-              <a:rPr lang="en-GB" dirty="0"/>
-              <a:t>Optoelectronic Modulation of 2D Silicon Carbide for </a:t>
+              <a:rPr lang="en-GB"/>
+              <a:t>Optoelectronic Modulation of 2D Silicon Carbide for Tunable and Efficient White Light Emission </a:t>
             </a:r>
-            <a:r>
-              <a:rPr lang="en-GB" dirty="0" err="1"/>
-              <a:t>Tunable</a:t>
-            </a:r>
-            <a:r>
-              <a:rPr lang="en-GB" dirty="0"/>
-              <a:t> and Efficient White Light Emission </a:t>
-            </a:r>
-            <a:endParaRPr dirty="0"/>
+            <a:endParaRPr lang="en-GB" dirty="0"/>
           </a:p>
         </p:txBody>
       </p:sp>
@@ -5026,7 +6143,11 @@
               </a:buClr>
               <a:buSzPts val="1800"/>
               <a:buNone/>
-              <a:defRPr/>
+              <a:defRPr sz="3600">
+                <a:solidFill>
+                  <a:srgbClr val="1DA3B8"/>
+                </a:solidFill>
+              </a:defRPr>
             </a:lvl1pPr>
             <a:lvl2pPr lvl="1">
               <a:spcBef>
@@ -5118,7 +6239,7 @@
             </a:lvl9pPr>
           </a:lstStyle>
           <a:p>
-            <a:endParaRPr/>
+            <a:endParaRPr dirty="0"/>
           </a:p>
         </p:txBody>
       </p:sp>
@@ -5278,7 +6399,7 @@
             </a:lvl9pPr>
           </a:lstStyle>
           <a:p>
-            <a:endParaRPr/>
+            <a:endParaRPr dirty="0"/>
           </a:p>
         </p:txBody>
       </p:sp>
@@ -5482,9 +6603,9 @@
               </a:spcAft>
               <a:buSzPts val="2800"/>
               <a:buNone/>
-              <a:defRPr sz="2800" b="1">
-                <a:solidFill>
-                  <a:srgbClr val="C00000"/>
+              <a:defRPr sz="2400" b="1">
+                <a:solidFill>
+                  <a:srgbClr val="1DA3B8"/>
                 </a:solidFill>
                 <a:latin typeface="Arial"/>
                 <a:ea typeface="Arial"/>
@@ -5606,7 +6727,7 @@
             </a:lvl9pPr>
           </a:lstStyle>
           <a:p>
-            <a:endParaRPr/>
+            <a:endParaRPr dirty="0"/>
           </a:p>
         </p:txBody>
       </p:sp>
@@ -5650,9 +6771,9 @@
               </a:spcAft>
               <a:buSzPts val="2800"/>
               <a:buNone/>
-              <a:defRPr sz="2800" b="1">
-                <a:solidFill>
-                  <a:srgbClr val="C00000"/>
+              <a:defRPr sz="2400" b="1">
+                <a:solidFill>
+                  <a:srgbClr val="1DA3B8"/>
                 </a:solidFill>
               </a:defRPr>
             </a:lvl1pPr>
@@ -5819,7 +6940,7 @@
               <a:buNone/>
               <a:defRPr sz="1600" b="0" i="0" u="none" strike="noStrike" cap="none">
                 <a:solidFill>
-                  <a:schemeClr val="lt1"/>
+                  <a:srgbClr val="4F5368"/>
                 </a:solidFill>
                 <a:latin typeface="Arial Narrow"/>
                 <a:ea typeface="Arial Narrow"/>
@@ -6034,7 +7155,7 @@
               <a:buNone/>
               <a:defRPr sz="1800" b="0" i="0" u="none" strike="noStrike" cap="none">
                 <a:solidFill>
-                  <a:schemeClr val="lt1"/>
+                  <a:srgbClr val="4F5368"/>
                 </a:solidFill>
                 <a:latin typeface="Arial Narrow"/>
                 <a:ea typeface="Arial Narrow"/>
@@ -6197,18 +7318,10 @@
           </a:lstStyle>
           <a:p>
             <a:r>
-              <a:rPr lang="en-GB" dirty="0"/>
-              <a:t>Optoelectronic Modulation of 2D Silicon Carbide for </a:t>
+              <a:rPr lang="en-GB"/>
+              <a:t>Optoelectronic Modulation of 2D Silicon Carbide for Tunable and Efficient White Light Emission </a:t>
             </a:r>
-            <a:r>
-              <a:rPr lang="en-GB" dirty="0" err="1"/>
-              <a:t>Tunable</a:t>
-            </a:r>
-            <a:r>
-              <a:rPr lang="en-GB" dirty="0"/>
-              <a:t> and Efficient White Light Emission </a:t>
-            </a:r>
-            <a:endParaRPr dirty="0"/>
+            <a:endParaRPr lang="en-GB" dirty="0"/>
           </a:p>
         </p:txBody>
       </p:sp>
@@ -6253,7 +7366,7 @@
               <a:buNone/>
               <a:defRPr sz="2400" b="1" i="0" u="none" strike="noStrike" cap="none">
                 <a:solidFill>
-                  <a:schemeClr val="lt1"/>
+                  <a:srgbClr val="4F5368"/>
                 </a:solidFill>
                 <a:latin typeface="Arial Narrow"/>
                 <a:ea typeface="Arial Narrow"/>
@@ -6383,20 +7496,12 @@
             </a:lvl9pPr>
           </a:lstStyle>
           <a:p>
-            <a:pPr marL="0" lvl="0" indent="0" algn="r" rtl="0">
-              <a:spcBef>
-                <a:spcPts val="0"/>
-              </a:spcBef>
-              <a:spcAft>
-                <a:spcPts val="0"/>
-              </a:spcAft>
-              <a:buNone/>
-            </a:pPr>
             <a:fld id="{00000000-1234-1234-1234-123412341234}" type="slidenum">
-              <a:rPr lang="en-US"/>
+              <a:rPr lang="en-US" smtClean="0"/>
+              <a:pPr/>
               <a:t>‹#›</a:t>
             </a:fld>
-            <a:endParaRPr dirty="0"/>
+            <a:endParaRPr lang="en-US" dirty="0"/>
           </a:p>
         </p:txBody>
       </p:sp>
@@ -6468,7 +7573,11 @@
               </a:buClr>
               <a:buSzPts val="1800"/>
               <a:buNone/>
-              <a:defRPr/>
+              <a:defRPr sz="3600">
+                <a:solidFill>
+                  <a:srgbClr val="1DA3B8"/>
+                </a:solidFill>
+              </a:defRPr>
             </a:lvl1pPr>
             <a:lvl2pPr lvl="1">
               <a:spcBef>
@@ -6560,7 +7669,7 @@
             </a:lvl9pPr>
           </a:lstStyle>
           <a:p>
-            <a:endParaRPr/>
+            <a:endParaRPr dirty="0"/>
           </a:p>
         </p:txBody>
       </p:sp>
@@ -6604,7 +7713,7 @@
               </a:spcAft>
               <a:buSzPts val="3200"/>
               <a:buChar char="◦"/>
-              <a:defRPr sz="3200"/>
+              <a:defRPr sz="2800"/>
             </a:lvl1pPr>
             <a:lvl2pPr marL="914400" lvl="1" indent="-406400" algn="l">
               <a:lnSpc>
@@ -6720,7 +7829,7 @@
             </a:lvl9pPr>
           </a:lstStyle>
           <a:p>
-            <a:endParaRPr/>
+            <a:endParaRPr dirty="0"/>
           </a:p>
         </p:txBody>
       </p:sp>
@@ -6769,7 +7878,7 @@
               <a:buNone/>
               <a:defRPr sz="1600" b="0" i="0" u="none" strike="noStrike" cap="none">
                 <a:solidFill>
-                  <a:schemeClr val="lt1"/>
+                  <a:srgbClr val="4F5368"/>
                 </a:solidFill>
                 <a:latin typeface="Arial Narrow"/>
                 <a:ea typeface="Arial Narrow"/>
@@ -6984,7 +8093,7 @@
               <a:buNone/>
               <a:defRPr sz="1800" b="0" i="0" u="none" strike="noStrike" cap="none">
                 <a:solidFill>
-                  <a:schemeClr val="lt1"/>
+                  <a:srgbClr val="4F5368"/>
                 </a:solidFill>
                 <a:latin typeface="Arial Narrow"/>
                 <a:ea typeface="Arial Narrow"/>
@@ -7147,18 +8256,10 @@
           </a:lstStyle>
           <a:p>
             <a:r>
-              <a:rPr lang="en-GB" dirty="0"/>
-              <a:t>Optoelectronic Modulation of 2D Silicon Carbide for </a:t>
+              <a:rPr lang="en-GB"/>
+              <a:t>Optoelectronic Modulation of 2D Silicon Carbide for Tunable and Efficient White Light Emission </a:t>
             </a:r>
-            <a:r>
-              <a:rPr lang="en-GB" dirty="0" err="1"/>
-              <a:t>Tunable</a:t>
-            </a:r>
-            <a:r>
-              <a:rPr lang="en-GB" dirty="0"/>
-              <a:t> and Efficient White Light Emission </a:t>
-            </a:r>
-            <a:endParaRPr dirty="0"/>
+            <a:endParaRPr lang="en-GB" dirty="0"/>
           </a:p>
         </p:txBody>
       </p:sp>
@@ -7203,7 +8304,7 @@
               <a:buNone/>
               <a:defRPr sz="2400" b="1" i="0" u="none" strike="noStrike" cap="none">
                 <a:solidFill>
-                  <a:schemeClr val="lt1"/>
+                  <a:srgbClr val="4F5368"/>
                 </a:solidFill>
                 <a:latin typeface="Arial Narrow"/>
                 <a:ea typeface="Arial Narrow"/>
@@ -7333,20 +8434,12 @@
             </a:lvl9pPr>
           </a:lstStyle>
           <a:p>
-            <a:pPr marL="0" lvl="0" indent="0" algn="r" rtl="0">
-              <a:spcBef>
-                <a:spcPts val="0"/>
-              </a:spcBef>
-              <a:spcAft>
-                <a:spcPts val="0"/>
-              </a:spcAft>
-              <a:buNone/>
-            </a:pPr>
             <a:fld id="{00000000-1234-1234-1234-123412341234}" type="slidenum">
-              <a:rPr lang="en-US"/>
+              <a:rPr lang="en-US" smtClean="0"/>
+              <a:pPr/>
               <a:t>‹#›</a:t>
             </a:fld>
-            <a:endParaRPr dirty="0"/>
+            <a:endParaRPr lang="en-US" dirty="0"/>
           </a:p>
         </p:txBody>
       </p:sp>
@@ -7398,11 +8491,21 @@
         </p:nvSpPr>
         <p:spPr/>
         <p:txBody>
-          <a:bodyPr/>
-          <a:lstStyle/>
+          <a:bodyPr>
+            <a:normAutofit/>
+          </a:bodyPr>
+          <a:lstStyle>
+            <a:lvl1pPr>
+              <a:defRPr sz="3600">
+                <a:solidFill>
+                  <a:srgbClr val="1DA3B8"/>
+                </a:solidFill>
+              </a:defRPr>
+            </a:lvl1pPr>
+          </a:lstStyle>
           <a:p>
             <a:r>
-              <a:rPr lang="en-US"/>
+              <a:rPr lang="en-US" dirty="0"/>
               <a:t>Click to edit Master title style</a:t>
             </a:r>
           </a:p>
@@ -7426,13 +8529,31 @@
         </p:nvSpPr>
         <p:spPr>
           <a:xfrm>
-            <a:off x="838200" y="1825625"/>
+            <a:off x="785037" y="1463148"/>
             <a:ext cx="5181600" cy="4351338"/>
           </a:xfrm>
         </p:spPr>
         <p:txBody>
-          <a:bodyPr/>
-          <a:lstStyle/>
+          <a:bodyPr>
+            <a:normAutofit/>
+          </a:bodyPr>
+          <a:lstStyle>
+            <a:lvl1pPr>
+              <a:defRPr sz="2400"/>
+            </a:lvl1pPr>
+            <a:lvl2pPr>
+              <a:defRPr sz="2000"/>
+            </a:lvl2pPr>
+            <a:lvl3pPr>
+              <a:defRPr sz="1800"/>
+            </a:lvl3pPr>
+            <a:lvl4pPr>
+              <a:defRPr sz="1800"/>
+            </a:lvl4pPr>
+            <a:lvl5pPr>
+              <a:defRPr sz="1800"/>
+            </a:lvl5pPr>
+          </a:lstStyle>
           <a:p>
             <a:pPr lvl="0"/>
             <a:r>
@@ -7488,13 +8609,31 @@
         </p:nvSpPr>
         <p:spPr>
           <a:xfrm>
-            <a:off x="6172200" y="1825625"/>
+            <a:off x="6119037" y="1463148"/>
             <a:ext cx="5181600" cy="4351338"/>
           </a:xfrm>
         </p:spPr>
         <p:txBody>
-          <a:bodyPr/>
-          <a:lstStyle/>
+          <a:bodyPr>
+            <a:normAutofit/>
+          </a:bodyPr>
+          <a:lstStyle>
+            <a:lvl1pPr>
+              <a:defRPr sz="2400"/>
+            </a:lvl1pPr>
+            <a:lvl2pPr>
+              <a:defRPr sz="2000"/>
+            </a:lvl2pPr>
+            <a:lvl3pPr>
+              <a:defRPr sz="1800"/>
+            </a:lvl3pPr>
+            <a:lvl4pPr>
+              <a:defRPr sz="1800"/>
+            </a:lvl4pPr>
+            <a:lvl5pPr>
+              <a:defRPr sz="1800"/>
+            </a:lvl5pPr>
+          </a:lstStyle>
           <a:p>
             <a:pPr lvl="0"/>
             <a:r>
@@ -7832,11 +8971,19 @@
           </a:lstStyle>
           <a:p>
             <a:fld id="{00000000-1234-1234-1234-123412341234}" type="slidenum">
-              <a:rPr lang="en-US" smtClean="0"/>
+              <a:rPr lang="en-US" smtClean="0">
+                <a:solidFill>
+                  <a:srgbClr val="4F5368"/>
+                </a:solidFill>
+              </a:rPr>
               <a:pPr/>
               <a:t>‹#›</a:t>
             </a:fld>
-            <a:endParaRPr lang="en-US" dirty="0"/>
+            <a:endParaRPr lang="en-US" dirty="0">
+              <a:solidFill>
+                <a:srgbClr val="4F5368"/>
+              </a:solidFill>
+            </a:endParaRPr>
           </a:p>
         </p:txBody>
       </p:sp>
@@ -7885,7 +9032,7 @@
               <a:buNone/>
               <a:defRPr sz="1600" b="0" i="0" u="none" strike="noStrike" cap="none">
                 <a:solidFill>
-                  <a:schemeClr val="lt1"/>
+                  <a:srgbClr val="4F5368"/>
                 </a:solidFill>
                 <a:latin typeface="Arial Narrow"/>
                 <a:ea typeface="Arial Narrow"/>
@@ -8100,7 +9247,7 @@
               <a:buNone/>
               <a:defRPr sz="1800" b="0" i="0" u="none" strike="noStrike" cap="none">
                 <a:solidFill>
-                  <a:schemeClr val="lt1"/>
+                  <a:srgbClr val="4F5368"/>
                 </a:solidFill>
                 <a:latin typeface="Arial Narrow"/>
                 <a:ea typeface="Arial Narrow"/>
@@ -8263,18 +9410,10 @@
           </a:lstStyle>
           <a:p>
             <a:r>
-              <a:rPr lang="en-GB" dirty="0"/>
-              <a:t>Optoelectronic Modulation of 2D Silicon Carbide for </a:t>
+              <a:rPr lang="en-GB"/>
+              <a:t>Optoelectronic Modulation of 2D Silicon Carbide for Tunable and Efficient White Light Emission </a:t>
             </a:r>
-            <a:r>
-              <a:rPr lang="en-GB" dirty="0" err="1"/>
-              <a:t>Tunable</a:t>
-            </a:r>
-            <a:r>
-              <a:rPr lang="en-GB" dirty="0"/>
-              <a:t> and Efficient White Light Emission </a:t>
-            </a:r>
-            <a:endParaRPr dirty="0"/>
+            <a:endParaRPr lang="en-GB" dirty="0"/>
           </a:p>
         </p:txBody>
       </p:sp>
@@ -8326,11 +9465,21 @@
         </p:nvSpPr>
         <p:spPr/>
         <p:txBody>
-          <a:bodyPr/>
-          <a:lstStyle/>
+          <a:bodyPr>
+            <a:normAutofit/>
+          </a:bodyPr>
+          <a:lstStyle>
+            <a:lvl1pPr>
+              <a:defRPr sz="3600">
+                <a:solidFill>
+                  <a:srgbClr val="1DA3B8"/>
+                </a:solidFill>
+              </a:defRPr>
+            </a:lvl1pPr>
+          </a:lstStyle>
           <a:p>
             <a:r>
-              <a:rPr lang="en-US"/>
+              <a:rPr lang="en-US" dirty="0"/>
               <a:t>Click to edit Master title style</a:t>
             </a:r>
           </a:p>
@@ -8377,7 +9526,7 @@
               <a:buNone/>
               <a:defRPr sz="2400" b="1" i="0" u="none" strike="noStrike" cap="none">
                 <a:solidFill>
-                  <a:schemeClr val="lt1"/>
+                  <a:srgbClr val="4F5368"/>
                 </a:solidFill>
                 <a:latin typeface="Arial Narrow"/>
                 <a:ea typeface="Arial Narrow"/>
@@ -8507,20 +9656,12 @@
             </a:lvl9pPr>
           </a:lstStyle>
           <a:p>
-            <a:pPr marL="0" lvl="0" indent="0" algn="r" rtl="0">
-              <a:spcBef>
-                <a:spcPts val="0"/>
-              </a:spcBef>
-              <a:spcAft>
-                <a:spcPts val="0"/>
-              </a:spcAft>
-              <a:buNone/>
-            </a:pPr>
             <a:fld id="{00000000-1234-1234-1234-123412341234}" type="slidenum">
-              <a:rPr lang="en-US"/>
+              <a:rPr lang="en-US" smtClean="0"/>
+              <a:pPr/>
               <a:t>‹#›</a:t>
             </a:fld>
-            <a:endParaRPr dirty="0"/>
+            <a:endParaRPr lang="en-US" dirty="0"/>
           </a:p>
         </p:txBody>
       </p:sp>
@@ -8569,7 +9710,7 @@
               <a:buNone/>
               <a:defRPr sz="1600" b="0" i="0" u="none" strike="noStrike" cap="none">
                 <a:solidFill>
-                  <a:schemeClr val="lt1"/>
+                  <a:srgbClr val="4F5368"/>
                 </a:solidFill>
                 <a:latin typeface="Arial Narrow"/>
                 <a:ea typeface="Arial Narrow"/>
@@ -8784,7 +9925,7 @@
               <a:buNone/>
               <a:defRPr sz="1800" b="0" i="0" u="none" strike="noStrike" cap="none">
                 <a:solidFill>
-                  <a:schemeClr val="lt1"/>
+                  <a:srgbClr val="4F5368"/>
                 </a:solidFill>
                 <a:latin typeface="Arial Narrow"/>
                 <a:ea typeface="Arial Narrow"/>
@@ -8947,18 +10088,10 @@
           </a:lstStyle>
           <a:p>
             <a:r>
-              <a:rPr lang="en-GB" dirty="0"/>
-              <a:t>Optoelectronic Modulation of 2D Silicon Carbide for </a:t>
+              <a:rPr lang="en-GB"/>
+              <a:t>Optoelectronic Modulation of 2D Silicon Carbide for Tunable and Efficient White Light Emission </a:t>
             </a:r>
-            <a:r>
-              <a:rPr lang="en-GB" dirty="0" err="1"/>
-              <a:t>Tunable</a:t>
-            </a:r>
-            <a:r>
-              <a:rPr lang="en-GB" dirty="0"/>
-              <a:t> and Efficient White Light Emission </a:t>
-            </a:r>
-            <a:endParaRPr dirty="0"/>
+            <a:endParaRPr lang="en-GB" dirty="0"/>
           </a:p>
         </p:txBody>
       </p:sp>
@@ -9035,7 +10168,10 @@
               </a:buClr>
               <a:buSzPts val="1800"/>
               <a:buNone/>
-              <a:defRPr>
+              <a:defRPr sz="3600">
+                <a:solidFill>
+                  <a:srgbClr val="1DA3B8"/>
+                </a:solidFill>
                 <a:latin typeface="+mj-lt"/>
               </a:defRPr>
             </a:lvl1pPr>
@@ -9378,7 +10514,7 @@
             <a:lvl1pPr algn="ctr">
               <a:defRPr sz="1400">
                 <a:solidFill>
-                  <a:srgbClr val="CDE8FB"/>
+                  <a:srgbClr val="4F5368"/>
                 </a:solidFill>
               </a:defRPr>
             </a:lvl1pPr>
@@ -9465,7 +10601,11 @@
               </a:buClr>
               <a:buSzPts val="1800"/>
               <a:buNone/>
-              <a:defRPr/>
+              <a:defRPr sz="3600">
+                <a:solidFill>
+                  <a:srgbClr val="1DA3B8"/>
+                </a:solidFill>
+              </a:defRPr>
             </a:lvl1pPr>
             <a:lvl2pPr lvl="1">
               <a:spcBef>
@@ -9557,7 +10697,7 @@
             </a:lvl9pPr>
           </a:lstStyle>
           <a:p>
-            <a:endParaRPr/>
+            <a:endParaRPr dirty="0"/>
           </a:p>
         </p:txBody>
       </p:sp>
@@ -9691,10 +10831,10 @@
           </a:lstStyle>
           <a:p>
             <a:r>
-              <a:rPr lang="en-US"/>
+              <a:rPr lang="en-US" dirty="0"/>
               <a:t>Paper ID: 250103165040                Session: 4P1a                             Date: 2025-05-08 </a:t>
             </a:r>
-            <a:endParaRPr/>
+            <a:endParaRPr dirty="0"/>
           </a:p>
         </p:txBody>
       </p:sp>
@@ -9737,7 +10877,7 @@
               <a:buNone/>
               <a:defRPr sz="3200">
                 <a:solidFill>
-                  <a:srgbClr val="C00000"/>
+                  <a:srgbClr val="1DA3B8"/>
                 </a:solidFill>
               </a:defRPr>
             </a:lvl1pPr>
@@ -9832,10 +10972,17 @@
           </a:lstStyle>
           <a:p>
             <a:r>
-              <a:rPr lang="en-GB"/>
-              <a:t>Optoelectronic Modulation of 2D Silicon Carbide for Tunable and Efficient White Light Emission </a:t>
+              <a:rPr lang="en-GB" dirty="0"/>
+              <a:t>Optoelectronic Modulation of 2D Silicon Carbide for </a:t>
             </a:r>
-            <a:endParaRPr/>
+            <a:r>
+              <a:rPr lang="en-GB" dirty="0" err="1"/>
+              <a:t>Tunable</a:t>
+            </a:r>
+            <a:r>
+              <a:rPr lang="en-GB" dirty="0"/>
+              <a:t> and Efficient White Light Emission </a:t>
+            </a:r>
           </a:p>
         </p:txBody>
       </p:sp>
@@ -10105,7 +11252,7 @@
             </a:lvl9pPr>
           </a:lstStyle>
           <a:p>
-            <a:endParaRPr/>
+            <a:endParaRPr dirty="0"/>
           </a:p>
         </p:txBody>
       </p:sp>
@@ -10337,7 +11484,11 @@
               </a:buClr>
               <a:buSzPts val="1800"/>
               <a:buNone/>
-              <a:defRPr/>
+              <a:defRPr sz="3600">
+                <a:solidFill>
+                  <a:srgbClr val="1DA3B8"/>
+                </a:solidFill>
+              </a:defRPr>
             </a:lvl1pPr>
             <a:lvl2pPr lvl="1">
               <a:spcBef>
@@ -10429,7 +11580,7 @@
             </a:lvl9pPr>
           </a:lstStyle>
           <a:p>
-            <a:endParaRPr/>
+            <a:endParaRPr dirty="0"/>
           </a:p>
         </p:txBody>
       </p:sp>
@@ -10473,7 +11624,7 @@
               </a:spcAft>
               <a:buSzPts val="2800"/>
               <a:buChar char="◦"/>
-              <a:defRPr sz="2800"/>
+              <a:defRPr sz="2000"/>
             </a:lvl1pPr>
             <a:lvl2pPr marL="914400" lvl="1" indent="-381000" algn="l">
               <a:lnSpc>
@@ -10589,7 +11740,7 @@
             </a:lvl9pPr>
           </a:lstStyle>
           <a:p>
-            <a:endParaRPr/>
+            <a:endParaRPr dirty="0"/>
           </a:p>
         </p:txBody>
       </p:sp>
@@ -10633,7 +11784,7 @@
               </a:spcAft>
               <a:buSzPts val="2800"/>
               <a:buChar char="◦"/>
-              <a:defRPr sz="2800"/>
+              <a:defRPr sz="2000"/>
             </a:lvl1pPr>
             <a:lvl2pPr marL="914400" lvl="1" indent="-381000" algn="l">
               <a:lnSpc>
@@ -10793,9 +11944,9 @@
               </a:spcAft>
               <a:buSzPts val="2800"/>
               <a:buNone/>
-              <a:defRPr sz="2800" b="1">
-                <a:solidFill>
-                  <a:srgbClr val="C00000"/>
+              <a:defRPr sz="2400" b="1">
+                <a:solidFill>
+                  <a:srgbClr val="1DA3B8"/>
                 </a:solidFill>
                 <a:latin typeface="Arial"/>
                 <a:ea typeface="Arial"/>
@@ -10917,7 +12068,7 @@
             </a:lvl9pPr>
           </a:lstStyle>
           <a:p>
-            <a:endParaRPr/>
+            <a:endParaRPr dirty="0"/>
           </a:p>
         </p:txBody>
       </p:sp>
@@ -11126,7 +12277,7 @@
               <a:buNone/>
               <a:defRPr sz="2400" b="1" i="0" u="none" strike="noStrike" cap="none">
                 <a:solidFill>
-                  <a:schemeClr val="lt1"/>
+                  <a:srgbClr val="4F5368"/>
                 </a:solidFill>
                 <a:latin typeface="Arial Narrow"/>
                 <a:ea typeface="Arial Narrow"/>
@@ -11256,20 +12407,12 @@
             </a:lvl9pPr>
           </a:lstStyle>
           <a:p>
-            <a:pPr marL="0" lvl="0" indent="0" algn="r" rtl="0">
-              <a:spcBef>
-                <a:spcPts val="0"/>
-              </a:spcBef>
-              <a:spcAft>
-                <a:spcPts val="0"/>
-              </a:spcAft>
-              <a:buNone/>
-            </a:pPr>
             <a:fld id="{00000000-1234-1234-1234-123412341234}" type="slidenum">
-              <a:rPr lang="en-US"/>
+              <a:rPr lang="en-US" smtClean="0"/>
+              <a:pPr/>
               <a:t>‹#›</a:t>
             </a:fld>
-            <a:endParaRPr dirty="0"/>
+            <a:endParaRPr lang="en-US" dirty="0"/>
           </a:p>
         </p:txBody>
       </p:sp>
@@ -11318,7 +12461,7 @@
               <a:buNone/>
               <a:defRPr sz="1600" b="0" i="0" u="none" strike="noStrike" cap="none">
                 <a:solidFill>
-                  <a:schemeClr val="lt1"/>
+                  <a:srgbClr val="4F5368"/>
                 </a:solidFill>
                 <a:latin typeface="Arial Narrow"/>
                 <a:ea typeface="Arial Narrow"/>
@@ -11533,7 +12676,7 @@
               <a:buNone/>
               <a:defRPr sz="1800" b="0" i="0" u="none" strike="noStrike" cap="none">
                 <a:solidFill>
-                  <a:schemeClr val="lt1"/>
+                  <a:srgbClr val="4F5368"/>
                 </a:solidFill>
                 <a:latin typeface="Arial Narrow"/>
                 <a:ea typeface="Arial Narrow"/>
@@ -11696,18 +12839,10 @@
           </a:lstStyle>
           <a:p>
             <a:r>
-              <a:rPr lang="en-GB" dirty="0"/>
-              <a:t>Optoelectronic Modulation of 2D Silicon Carbide for </a:t>
+              <a:rPr lang="en-GB"/>
+              <a:t>Optoelectronic Modulation of 2D Silicon Carbide for Tunable and Efficient White Light Emission </a:t>
             </a:r>
-            <a:r>
-              <a:rPr lang="en-GB" dirty="0" err="1"/>
-              <a:t>Tunable</a:t>
-            </a:r>
-            <a:r>
-              <a:rPr lang="en-GB" dirty="0"/>
-              <a:t> and Efficient White Light Emission </a:t>
-            </a:r>
-            <a:endParaRPr dirty="0"/>
+            <a:endParaRPr lang="en-GB" dirty="0"/>
           </a:p>
         </p:txBody>
       </p:sp>
@@ -11759,7 +12894,7 @@
             <a:avLst/>
           </a:prstGeom>
           <a:solidFill>
-            <a:srgbClr val="C00000"/>
+            <a:srgbClr val="1DA3B8"/>
           </a:solidFill>
           <a:ln>
             <a:noFill/>
@@ -11936,7 +13071,7 @@
             </a:lvl9pPr>
           </a:lstStyle>
           <a:p>
-            <a:endParaRPr/>
+            <a:endParaRPr dirty="0"/>
           </a:p>
         </p:txBody>
       </p:sp>
@@ -12942,7 +14077,11 @@
               </a:buClr>
               <a:buSzPts val="1800"/>
               <a:buNone/>
-              <a:defRPr/>
+              <a:defRPr>
+                <a:solidFill>
+                  <a:srgbClr val="1DA3B8"/>
+                </a:solidFill>
+              </a:defRPr>
             </a:lvl1pPr>
             <a:lvl2pPr lvl="1">
               <a:spcBef>
@@ -13034,7 +14173,7 @@
             </a:lvl9pPr>
           </a:lstStyle>
           <a:p>
-            <a:endParaRPr/>
+            <a:endParaRPr dirty="0"/>
           </a:p>
         </p:txBody>
       </p:sp>
@@ -13079,7 +14218,7 @@
               <a:buNone/>
               <a:defRPr sz="2400" b="1" i="0" u="none" strike="noStrike" cap="none">
                 <a:solidFill>
-                  <a:schemeClr val="lt1"/>
+                  <a:srgbClr val="4F5368"/>
                 </a:solidFill>
                 <a:latin typeface="Arial Narrow"/>
                 <a:ea typeface="Arial Narrow"/>
@@ -13209,20 +14348,12 @@
             </a:lvl9pPr>
           </a:lstStyle>
           <a:p>
-            <a:pPr marL="0" lvl="0" indent="0" algn="r" rtl="0">
-              <a:spcBef>
-                <a:spcPts val="0"/>
-              </a:spcBef>
-              <a:spcAft>
-                <a:spcPts val="0"/>
-              </a:spcAft>
-              <a:buNone/>
-            </a:pPr>
             <a:fld id="{00000000-1234-1234-1234-123412341234}" type="slidenum">
-              <a:rPr lang="en-US"/>
+              <a:rPr lang="en-US" smtClean="0"/>
+              <a:pPr/>
               <a:t>‹#›</a:t>
             </a:fld>
-            <a:endParaRPr dirty="0"/>
+            <a:endParaRPr lang="en-US" dirty="0"/>
           </a:p>
         </p:txBody>
       </p:sp>
@@ -13271,7 +14402,7 @@
               <a:buNone/>
               <a:defRPr sz="1600" b="0" i="0" u="none" strike="noStrike" cap="none">
                 <a:solidFill>
-                  <a:schemeClr val="lt1"/>
+                  <a:srgbClr val="4F5368"/>
                 </a:solidFill>
                 <a:latin typeface="Arial Narrow"/>
                 <a:ea typeface="Arial Narrow"/>
@@ -13486,7 +14617,7 @@
               <a:buNone/>
               <a:defRPr sz="1800" b="0" i="0" u="none" strike="noStrike" cap="none">
                 <a:solidFill>
-                  <a:schemeClr val="lt1"/>
+                  <a:srgbClr val="4F5368"/>
                 </a:solidFill>
                 <a:latin typeface="Arial Narrow"/>
                 <a:ea typeface="Arial Narrow"/>
@@ -13649,18 +14780,10 @@
           </a:lstStyle>
           <a:p>
             <a:r>
-              <a:rPr lang="en-GB" dirty="0"/>
-              <a:t>Optoelectronic Modulation of 2D Silicon Carbide for </a:t>
+              <a:rPr lang="en-GB"/>
+              <a:t>Optoelectronic Modulation of 2D Silicon Carbide for Tunable and Efficient White Light Emission </a:t>
             </a:r>
-            <a:r>
-              <a:rPr lang="en-GB" dirty="0" err="1"/>
-              <a:t>Tunable</a:t>
-            </a:r>
-            <a:r>
-              <a:rPr lang="en-GB" dirty="0"/>
-              <a:t> and Efficient White Light Emission </a:t>
-            </a:r>
-            <a:endParaRPr dirty="0"/>
+            <a:endParaRPr lang="en-GB" dirty="0"/>
           </a:p>
         </p:txBody>
       </p:sp>
@@ -13730,7 +14853,7 @@
               <a:buNone/>
               <a:defRPr sz="2400" b="1" i="0" u="none" strike="noStrike" cap="none">
                 <a:solidFill>
-                  <a:schemeClr val="lt1"/>
+                  <a:srgbClr val="4F5368"/>
                 </a:solidFill>
                 <a:latin typeface="Arial Narrow"/>
                 <a:ea typeface="Arial Narrow"/>
@@ -13860,20 +14983,12 @@
             </a:lvl9pPr>
           </a:lstStyle>
           <a:p>
-            <a:pPr marL="0" lvl="0" indent="0" algn="r" rtl="0">
-              <a:spcBef>
-                <a:spcPts val="0"/>
-              </a:spcBef>
-              <a:spcAft>
-                <a:spcPts val="0"/>
-              </a:spcAft>
-              <a:buNone/>
-            </a:pPr>
             <a:fld id="{00000000-1234-1234-1234-123412341234}" type="slidenum">
-              <a:rPr lang="en-US"/>
+              <a:rPr lang="en-US" smtClean="0"/>
+              <a:pPr/>
               <a:t>‹#›</a:t>
             </a:fld>
-            <a:endParaRPr dirty="0"/>
+            <a:endParaRPr lang="en-US" dirty="0"/>
           </a:p>
         </p:txBody>
       </p:sp>
@@ -13922,7 +15037,7 @@
               <a:buNone/>
               <a:defRPr sz="1600" b="0" i="0" u="none" strike="noStrike" cap="none">
                 <a:solidFill>
-                  <a:schemeClr val="lt1"/>
+                  <a:srgbClr val="4F5368"/>
                 </a:solidFill>
                 <a:latin typeface="Arial Narrow"/>
                 <a:ea typeface="Arial Narrow"/>
@@ -14137,7 +15252,7 @@
               <a:buNone/>
               <a:defRPr sz="1800" b="0" i="0" u="none" strike="noStrike" cap="none">
                 <a:solidFill>
-                  <a:schemeClr val="lt1"/>
+                  <a:srgbClr val="4F5368"/>
                 </a:solidFill>
                 <a:latin typeface="Arial Narrow"/>
                 <a:ea typeface="Arial Narrow"/>
@@ -14300,18 +15415,10 @@
           </a:lstStyle>
           <a:p>
             <a:r>
-              <a:rPr lang="en-GB" dirty="0"/>
-              <a:t>Optoelectronic Modulation of 2D Silicon Carbide for </a:t>
+              <a:rPr lang="en-GB"/>
+              <a:t>Optoelectronic Modulation of 2D Silicon Carbide for Tunable and Efficient White Light Emission </a:t>
             </a:r>
-            <a:r>
-              <a:rPr lang="en-GB" dirty="0" err="1"/>
-              <a:t>Tunable</a:t>
-            </a:r>
-            <a:r>
-              <a:rPr lang="en-GB" dirty="0"/>
-              <a:t> and Efficient White Light Emission </a:t>
-            </a:r>
-            <a:endParaRPr dirty="0"/>
+            <a:endParaRPr lang="en-GB" dirty="0"/>
           </a:p>
         </p:txBody>
       </p:sp>
@@ -14383,7 +15490,11 @@
               </a:buClr>
               <a:buSzPts val="1800"/>
               <a:buNone/>
-              <a:defRPr/>
+              <a:defRPr sz="3600">
+                <a:solidFill>
+                  <a:srgbClr val="1DA3B8"/>
+                </a:solidFill>
+              </a:defRPr>
             </a:lvl1pPr>
             <a:lvl2pPr lvl="1">
               <a:spcBef>
@@ -14475,7 +15586,7 @@
             </a:lvl9pPr>
           </a:lstStyle>
           <a:p>
-            <a:endParaRPr/>
+            <a:endParaRPr dirty="0"/>
           </a:p>
         </p:txBody>
       </p:sp>
@@ -14519,7 +15630,7 @@
               </a:spcAft>
               <a:buSzPts val="2800"/>
               <a:buChar char="◦"/>
-              <a:defRPr sz="2800"/>
+              <a:defRPr sz="2000"/>
             </a:lvl1pPr>
             <a:lvl2pPr marL="914400" lvl="1" indent="-381000" algn="l">
               <a:lnSpc>
@@ -14679,7 +15790,7 @@
               </a:spcAft>
               <a:buSzPts val="2800"/>
               <a:buChar char="◦"/>
-              <a:defRPr sz="2800"/>
+              <a:defRPr sz="2000"/>
             </a:lvl1pPr>
             <a:lvl2pPr marL="914400" lvl="1" indent="-381000" algn="l">
               <a:lnSpc>
@@ -14795,7 +15906,7 @@
             </a:lvl9pPr>
           </a:lstStyle>
           <a:p>
-            <a:endParaRPr/>
+            <a:endParaRPr dirty="0"/>
           </a:p>
         </p:txBody>
       </p:sp>
@@ -14839,9 +15950,9 @@
               </a:spcAft>
               <a:buSzPts val="2800"/>
               <a:buNone/>
-              <a:defRPr sz="2800" b="1">
-                <a:solidFill>
-                  <a:srgbClr val="C00000"/>
+              <a:defRPr sz="2400" b="1">
+                <a:solidFill>
+                  <a:srgbClr val="1DA3B8"/>
                 </a:solidFill>
                 <a:latin typeface="Arial"/>
                 <a:ea typeface="Arial"/>
@@ -14963,7 +16074,7 @@
             </a:lvl9pPr>
           </a:lstStyle>
           <a:p>
-            <a:endParaRPr/>
+            <a:endParaRPr dirty="0"/>
           </a:p>
         </p:txBody>
       </p:sp>
@@ -15007,9 +16118,9 @@
               </a:spcAft>
               <a:buSzPts val="2800"/>
               <a:buNone/>
-              <a:defRPr sz="2800" b="1">
-                <a:solidFill>
-                  <a:srgbClr val="C00000"/>
+              <a:defRPr sz="2400" b="1">
+                <a:solidFill>
+                  <a:srgbClr val="1DA3B8"/>
                 </a:solidFill>
               </a:defRPr>
             </a:lvl1pPr>
@@ -15127,7 +16238,7 @@
             </a:lvl9pPr>
           </a:lstStyle>
           <a:p>
-            <a:endParaRPr/>
+            <a:endParaRPr dirty="0"/>
           </a:p>
         </p:txBody>
       </p:sp>
@@ -15172,7 +16283,7 @@
               <a:buNone/>
               <a:defRPr sz="2400" b="1" i="0" u="none" strike="noStrike" cap="none">
                 <a:solidFill>
-                  <a:schemeClr val="lt1"/>
+                  <a:srgbClr val="4F5368"/>
                 </a:solidFill>
                 <a:latin typeface="Arial Narrow"/>
                 <a:ea typeface="Arial Narrow"/>
@@ -15302,20 +16413,12 @@
             </a:lvl9pPr>
           </a:lstStyle>
           <a:p>
-            <a:pPr marL="0" lvl="0" indent="0" algn="r" rtl="0">
-              <a:spcBef>
-                <a:spcPts val="0"/>
-              </a:spcBef>
-              <a:spcAft>
-                <a:spcPts val="0"/>
-              </a:spcAft>
-              <a:buNone/>
-            </a:pPr>
             <a:fld id="{00000000-1234-1234-1234-123412341234}" type="slidenum">
-              <a:rPr lang="en-US"/>
+              <a:rPr lang="en-US" smtClean="0"/>
+              <a:pPr/>
               <a:t>‹#›</a:t>
             </a:fld>
-            <a:endParaRPr dirty="0"/>
+            <a:endParaRPr lang="en-US" dirty="0"/>
           </a:p>
         </p:txBody>
       </p:sp>
@@ -15364,7 +16467,7 @@
               <a:buNone/>
               <a:defRPr sz="1600" b="0" i="0" u="none" strike="noStrike" cap="none">
                 <a:solidFill>
-                  <a:schemeClr val="lt1"/>
+                  <a:srgbClr val="4F5368"/>
                 </a:solidFill>
                 <a:latin typeface="Arial Narrow"/>
                 <a:ea typeface="Arial Narrow"/>
@@ -15579,7 +16682,7 @@
               <a:buNone/>
               <a:defRPr sz="1800" b="0" i="0" u="none" strike="noStrike" cap="none">
                 <a:solidFill>
-                  <a:schemeClr val="lt1"/>
+                  <a:srgbClr val="4F5368"/>
                 </a:solidFill>
                 <a:latin typeface="Arial Narrow"/>
                 <a:ea typeface="Arial Narrow"/>
@@ -15742,18 +16845,10 @@
           </a:lstStyle>
           <a:p>
             <a:r>
-              <a:rPr lang="en-GB" dirty="0"/>
-              <a:t>Optoelectronic Modulation of 2D Silicon Carbide for </a:t>
+              <a:rPr lang="en-GB"/>
+              <a:t>Optoelectronic Modulation of 2D Silicon Carbide for Tunable and Efficient White Light Emission </a:t>
             </a:r>
-            <a:r>
-              <a:rPr lang="en-GB" dirty="0" err="1"/>
-              <a:t>Tunable</a:t>
-            </a:r>
-            <a:r>
-              <a:rPr lang="en-GB" dirty="0"/>
-              <a:t> and Efficient White Light Emission </a:t>
-            </a:r>
-            <a:endParaRPr dirty="0"/>
+            <a:endParaRPr lang="en-GB" dirty="0"/>
           </a:p>
         </p:txBody>
       </p:sp>
@@ -15825,7 +16920,11 @@
               </a:buClr>
               <a:buSzPts val="1800"/>
               <a:buNone/>
-              <a:defRPr/>
+              <a:defRPr sz="3600">
+                <a:solidFill>
+                  <a:srgbClr val="1DA3B8"/>
+                </a:solidFill>
+              </a:defRPr>
             </a:lvl1pPr>
             <a:lvl2pPr lvl="1">
               <a:spcBef>
@@ -15917,7 +17016,7 @@
             </a:lvl9pPr>
           </a:lstStyle>
           <a:p>
-            <a:endParaRPr/>
+            <a:endParaRPr dirty="0"/>
           </a:p>
         </p:txBody>
       </p:sp>
@@ -15961,7 +17060,7 @@
               </a:spcAft>
               <a:buSzPts val="3200"/>
               <a:buChar char="◦"/>
-              <a:defRPr sz="3200"/>
+              <a:defRPr sz="2800"/>
             </a:lvl1pPr>
             <a:lvl2pPr marL="914400" lvl="1" indent="-406400" algn="l">
               <a:lnSpc>
@@ -16077,7 +17176,7 @@
             </a:lvl9pPr>
           </a:lstStyle>
           <a:p>
-            <a:endParaRPr/>
+            <a:endParaRPr dirty="0"/>
           </a:p>
         </p:txBody>
       </p:sp>
@@ -16122,7 +17221,7 @@
               <a:buNone/>
               <a:defRPr sz="2400" b="1" i="0" u="none" strike="noStrike" cap="none">
                 <a:solidFill>
-                  <a:schemeClr val="lt1"/>
+                  <a:srgbClr val="4F5368"/>
                 </a:solidFill>
                 <a:latin typeface="Arial Narrow"/>
                 <a:ea typeface="Arial Narrow"/>
@@ -16252,20 +17351,12 @@
             </a:lvl9pPr>
           </a:lstStyle>
           <a:p>
-            <a:pPr marL="0" lvl="0" indent="0" algn="r" rtl="0">
-              <a:spcBef>
-                <a:spcPts val="0"/>
-              </a:spcBef>
-              <a:spcAft>
-                <a:spcPts val="0"/>
-              </a:spcAft>
-              <a:buNone/>
-            </a:pPr>
             <a:fld id="{00000000-1234-1234-1234-123412341234}" type="slidenum">
-              <a:rPr lang="en-US"/>
+              <a:rPr lang="en-US" smtClean="0"/>
+              <a:pPr/>
               <a:t>‹#›</a:t>
             </a:fld>
-            <a:endParaRPr dirty="0"/>
+            <a:endParaRPr lang="en-US" dirty="0"/>
           </a:p>
         </p:txBody>
       </p:sp>
@@ -16314,7 +17405,7 @@
               <a:buNone/>
               <a:defRPr sz="1600" b="0" i="0" u="none" strike="noStrike" cap="none">
                 <a:solidFill>
-                  <a:schemeClr val="lt1"/>
+                  <a:srgbClr val="4F5368"/>
                 </a:solidFill>
                 <a:latin typeface="Arial Narrow"/>
                 <a:ea typeface="Arial Narrow"/>
@@ -16529,7 +17620,7 @@
               <a:buNone/>
               <a:defRPr sz="1800" b="0" i="0" u="none" strike="noStrike" cap="none">
                 <a:solidFill>
-                  <a:schemeClr val="lt1"/>
+                  <a:srgbClr val="4F5368"/>
                 </a:solidFill>
                 <a:latin typeface="Arial Narrow"/>
                 <a:ea typeface="Arial Narrow"/>
@@ -16692,18 +17783,10 @@
           </a:lstStyle>
           <a:p>
             <a:r>
-              <a:rPr lang="en-GB" dirty="0"/>
-              <a:t>Optoelectronic Modulation of 2D Silicon Carbide for </a:t>
+              <a:rPr lang="en-GB"/>
+              <a:t>Optoelectronic Modulation of 2D Silicon Carbide for Tunable and Efficient White Light Emission </a:t>
             </a:r>
-            <a:r>
-              <a:rPr lang="en-GB" dirty="0" err="1"/>
-              <a:t>Tunable</a:t>
-            </a:r>
-            <a:r>
-              <a:rPr lang="en-GB" dirty="0"/>
-              <a:t> and Efficient White Light Emission </a:t>
-            </a:r>
-            <a:endParaRPr dirty="0"/>
+            <a:endParaRPr lang="en-GB" dirty="0"/>
           </a:p>
         </p:txBody>
       </p:sp>
@@ -16775,7 +17858,11 @@
               </a:buClr>
               <a:buSzPts val="1800"/>
               <a:buNone/>
-              <a:defRPr/>
+              <a:defRPr sz="3600">
+                <a:solidFill>
+                  <a:srgbClr val="1DA3B8"/>
+                </a:solidFill>
+              </a:defRPr>
             </a:lvl1pPr>
             <a:lvl2pPr lvl="1">
               <a:spcBef>
@@ -16867,7 +17954,7 @@
             </a:lvl9pPr>
           </a:lstStyle>
           <a:p>
-            <a:endParaRPr/>
+            <a:endParaRPr dirty="0"/>
           </a:p>
         </p:txBody>
       </p:sp>
@@ -16912,7 +17999,7 @@
               <a:buNone/>
               <a:defRPr sz="2400" b="1" i="0" u="none" strike="noStrike" cap="none">
                 <a:solidFill>
-                  <a:schemeClr val="lt1"/>
+                  <a:srgbClr val="4F5368"/>
                 </a:solidFill>
                 <a:latin typeface="Arial Narrow"/>
                 <a:ea typeface="Arial Narrow"/>
@@ -17042,20 +18129,12 @@
             </a:lvl9pPr>
           </a:lstStyle>
           <a:p>
-            <a:pPr marL="0" lvl="0" indent="0" algn="r" rtl="0">
-              <a:spcBef>
-                <a:spcPts val="0"/>
-              </a:spcBef>
-              <a:spcAft>
-                <a:spcPts val="0"/>
-              </a:spcAft>
-              <a:buNone/>
-            </a:pPr>
             <a:fld id="{00000000-1234-1234-1234-123412341234}" type="slidenum">
-              <a:rPr lang="en-US"/>
+              <a:rPr lang="en-US" smtClean="0"/>
+              <a:pPr/>
               <a:t>‹#›</a:t>
             </a:fld>
-            <a:endParaRPr dirty="0"/>
+            <a:endParaRPr lang="en-US" dirty="0"/>
           </a:p>
         </p:txBody>
       </p:sp>
@@ -17104,7 +18183,7 @@
               <a:buNone/>
               <a:defRPr sz="1600" b="0" i="0" u="none" strike="noStrike" cap="none">
                 <a:solidFill>
-                  <a:schemeClr val="lt1"/>
+                  <a:srgbClr val="4F5368"/>
                 </a:solidFill>
                 <a:latin typeface="Arial Narrow"/>
                 <a:ea typeface="Arial Narrow"/>
@@ -17319,7 +18398,7 @@
               <a:buNone/>
               <a:defRPr sz="1800" b="0" i="0" u="none" strike="noStrike" cap="none">
                 <a:solidFill>
-                  <a:schemeClr val="lt1"/>
+                  <a:srgbClr val="4F5368"/>
                 </a:solidFill>
                 <a:latin typeface="Arial Narrow"/>
                 <a:ea typeface="Arial Narrow"/>
@@ -17482,18 +18561,10 @@
           </a:lstStyle>
           <a:p>
             <a:r>
-              <a:rPr lang="en-GB" dirty="0"/>
-              <a:t>Optoelectronic Modulation of 2D Silicon Carbide for </a:t>
+              <a:rPr lang="en-GB"/>
+              <a:t>Optoelectronic Modulation of 2D Silicon Carbide for Tunable and Efficient White Light Emission </a:t>
             </a:r>
-            <a:r>
-              <a:rPr lang="en-GB" dirty="0" err="1"/>
-              <a:t>Tunable</a:t>
-            </a:r>
-            <a:r>
-              <a:rPr lang="en-GB" dirty="0"/>
-              <a:t> and Efficient White Light Emission </a:t>
-            </a:r>
-            <a:endParaRPr dirty="0"/>
+            <a:endParaRPr lang="en-GB" dirty="0"/>
           </a:p>
         </p:txBody>
       </p:sp>
@@ -17545,7 +18616,9 @@
             <a:avLst/>
           </a:prstGeom>
           <a:solidFill>
-            <a:srgbClr val="4F5368"/>
+            <a:schemeClr val="bg1">
+              <a:lumMod val="85000"/>
+            </a:schemeClr>
           </a:solidFill>
           <a:ln>
             <a:noFill/>
@@ -18006,7 +19079,7 @@
         </p:nvSpPr>
         <p:spPr>
           <a:xfrm>
-            <a:off x="9282742" y="6194582"/>
+            <a:off x="8806087" y="6194582"/>
             <a:ext cx="673041" cy="615212"/>
           </a:xfrm>
           <a:prstGeom prst="rect">
@@ -18029,7 +19102,10 @@
               <a:buNone/>
               <a:defRPr sz="2400" b="1" i="0" u="none" strike="noStrike" cap="none">
                 <a:solidFill>
-                  <a:schemeClr val="lt1"/>
+                  <a:schemeClr val="tx1">
+                    <a:lumMod val="65000"/>
+                    <a:lumOff val="35000"/>
+                  </a:schemeClr>
                 </a:solidFill>
                 <a:latin typeface="Arial Narrow"/>
                 <a:ea typeface="Arial Narrow"/>
@@ -18159,20 +19235,12 @@
             </a:lvl9pPr>
           </a:lstStyle>
           <a:p>
-            <a:pPr marL="0" lvl="0" indent="0" algn="r" rtl="0">
-              <a:spcBef>
-                <a:spcPts val="0"/>
-              </a:spcBef>
-              <a:spcAft>
-                <a:spcPts val="0"/>
-              </a:spcAft>
-              <a:buNone/>
-            </a:pPr>
             <a:fld id="{00000000-1234-1234-1234-123412341234}" type="slidenum">
-              <a:rPr lang="en-US"/>
+              <a:rPr lang="en-US" smtClean="0"/>
+              <a:pPr/>
               <a:t>‹#›</a:t>
             </a:fld>
-            <a:endParaRPr dirty="0"/>
+            <a:endParaRPr lang="en-US" dirty="0"/>
           </a:p>
         </p:txBody>
       </p:sp>
@@ -18188,7 +19256,7 @@
         </p:nvSpPr>
         <p:spPr>
           <a:xfrm>
-            <a:off x="2025361" y="6156110"/>
+            <a:off x="1548706" y="6156110"/>
             <a:ext cx="2049934" cy="668821"/>
           </a:xfrm>
           <a:prstGeom prst="rect">
@@ -18215,7 +19283,10 @@
               <a:buNone/>
               <a:defRPr sz="1600" b="0" i="0" u="none" strike="noStrike" cap="none">
                 <a:solidFill>
-                  <a:schemeClr val="lt1"/>
+                  <a:schemeClr val="tx1">
+                    <a:lumMod val="65000"/>
+                    <a:lumOff val="35000"/>
+                  </a:schemeClr>
                 </a:solidFill>
                 <a:latin typeface="Arial Narrow"/>
                 <a:ea typeface="Arial Narrow"/>
@@ -18378,7 +19449,7 @@
           </a:lstStyle>
           <a:p>
             <a:r>
-              <a:rPr lang="en-US"/>
+              <a:rPr lang="en-US" dirty="0"/>
               <a:t>Paper ID: 250103165040                Session: 4P1a                             Date: 2025-05-08 </a:t>
             </a:r>
             <a:endParaRPr lang="en-GB" dirty="0"/>
@@ -18397,7 +19468,7 @@
         </p:nvSpPr>
         <p:spPr>
           <a:xfrm>
-            <a:off x="4244682" y="6141748"/>
+            <a:off x="3768027" y="6141748"/>
             <a:ext cx="4691990" cy="729006"/>
           </a:xfrm>
           <a:prstGeom prst="rect">
@@ -18424,7 +19495,10 @@
               <a:buNone/>
               <a:defRPr sz="1800" b="0" i="0" u="none" strike="noStrike" cap="none">
                 <a:solidFill>
-                  <a:schemeClr val="lt1"/>
+                  <a:schemeClr val="tx1">
+                    <a:lumMod val="65000"/>
+                    <a:lumOff val="35000"/>
+                  </a:schemeClr>
                 </a:solidFill>
                 <a:latin typeface="Arial Narrow"/>
                 <a:ea typeface="Arial Narrow"/>
@@ -18598,7 +19672,6 @@
               <a:rPr lang="en-GB" dirty="0"/>
               <a:t> and Efficient White Light Emission </a:t>
             </a:r>
-            <a:endParaRPr dirty="0"/>
           </a:p>
         </p:txBody>
       </p:sp>
@@ -18638,191 +19711,6 @@
           </a:prstGeom>
         </p:spPr>
       </p:pic>
-      <p:grpSp>
-        <p:nvGrpSpPr>
-          <p:cNvPr id="18" name="Group 17">
-            <a:extLst>
-              <a:ext uri="{FF2B5EF4-FFF2-40B4-BE49-F238E27FC236}">
-                <a16:creationId xmlns:a16="http://schemas.microsoft.com/office/drawing/2014/main" id="{A8857D7D-2A06-0290-2779-8649E24E9D2E}"/>
-              </a:ext>
-            </a:extLst>
-          </p:cNvPr>
-          <p:cNvGrpSpPr/>
-          <p:nvPr userDrawn="1"/>
-        </p:nvGrpSpPr>
-        <p:grpSpPr>
-          <a:xfrm>
-            <a:off x="10036975" y="6118987"/>
-            <a:ext cx="2151879" cy="767400"/>
-            <a:chOff x="717471" y="6141429"/>
-            <a:chExt cx="2151879" cy="767400"/>
-          </a:xfrm>
-        </p:grpSpPr>
-        <p:pic>
-          <p:nvPicPr>
-            <p:cNvPr id="2" name="Graphic 1">
-              <a:extLst>
-                <a:ext uri="{FF2B5EF4-FFF2-40B4-BE49-F238E27FC236}">
-                  <a16:creationId xmlns:a16="http://schemas.microsoft.com/office/drawing/2014/main" id="{D5B28BCC-8EAE-B021-667E-F684E2DEA784}"/>
-                </a:ext>
-              </a:extLst>
-            </p:cNvPr>
-            <p:cNvPicPr>
-              <a:picLocks noChangeAspect="1"/>
-            </p:cNvPicPr>
-            <p:nvPr userDrawn="1"/>
-          </p:nvPicPr>
-          <p:blipFill>
-            <a:blip r:embed="rId19">
-              <a:extLst>
-                <a:ext uri="{96DAC541-7B7A-43D3-8B79-37D633B846F1}">
-                  <asvg:svgBlip xmlns:asvg="http://schemas.microsoft.com/office/drawing/2016/SVG/main" r:embed="rId20"/>
-                </a:ext>
-              </a:extLst>
-            </a:blip>
-            <a:stretch>
-              <a:fillRect/>
-            </a:stretch>
-          </p:blipFill>
-          <p:spPr>
-            <a:xfrm>
-              <a:off x="2166248" y="6141429"/>
-              <a:ext cx="703102" cy="729006"/>
-            </a:xfrm>
-            <a:prstGeom prst="rect">
-              <a:avLst/>
-            </a:prstGeom>
-          </p:spPr>
-        </p:pic>
-        <p:pic>
-          <p:nvPicPr>
-            <p:cNvPr id="8" name="Graphic 7">
-              <a:extLst>
-                <a:ext uri="{FF2B5EF4-FFF2-40B4-BE49-F238E27FC236}">
-                  <a16:creationId xmlns:a16="http://schemas.microsoft.com/office/drawing/2014/main" id="{F1DEE58E-FC03-E272-8D6C-61DDF099ADED}"/>
-                </a:ext>
-              </a:extLst>
-            </p:cNvPr>
-            <p:cNvPicPr>
-              <a:picLocks noChangeAspect="1"/>
-            </p:cNvPicPr>
-            <p:nvPr userDrawn="1"/>
-          </p:nvPicPr>
-          <p:blipFill>
-            <a:blip r:embed="rId21">
-              <a:extLst>
-                <a:ext uri="{96DAC541-7B7A-43D3-8B79-37D633B846F1}">
-                  <asvg:svgBlip xmlns:asvg="http://schemas.microsoft.com/office/drawing/2016/SVG/main" r:embed="rId22"/>
-                </a:ext>
-              </a:extLst>
-            </a:blip>
-            <a:stretch>
-              <a:fillRect/>
-            </a:stretch>
-          </p:blipFill>
-          <p:spPr>
-            <a:xfrm>
-              <a:off x="726076" y="6172756"/>
-              <a:ext cx="484576" cy="447012"/>
-            </a:xfrm>
-            <a:prstGeom prst="rect">
-              <a:avLst/>
-            </a:prstGeom>
-          </p:spPr>
-        </p:pic>
-        <p:sp>
-          <p:nvSpPr>
-            <p:cNvPr id="9" name="TextBox 8">
-              <a:extLst>
-                <a:ext uri="{FF2B5EF4-FFF2-40B4-BE49-F238E27FC236}">
-                  <a16:creationId xmlns:a16="http://schemas.microsoft.com/office/drawing/2014/main" id="{039869B6-F6AD-C386-4F6E-3A529B4BA236}"/>
-                </a:ext>
-              </a:extLst>
-            </p:cNvPr>
-            <p:cNvSpPr txBox="1"/>
-            <p:nvPr userDrawn="1"/>
-          </p:nvSpPr>
-          <p:spPr>
-            <a:xfrm>
-              <a:off x="1130685" y="6217023"/>
-              <a:ext cx="1230213" cy="461665"/>
-            </a:xfrm>
-            <a:prstGeom prst="rect">
-              <a:avLst/>
-            </a:prstGeom>
-            <a:noFill/>
-          </p:spPr>
-          <p:txBody>
-            <a:bodyPr wrap="square" rtlCol="0">
-              <a:spAutoFit/>
-            </a:bodyPr>
-            <a:lstStyle/>
-            <a:p>
-              <a:r>
-                <a:rPr lang="en-US" sz="2400" dirty="0">
-                  <a:solidFill>
-                    <a:schemeClr val="bg1"/>
-                  </a:solidFill>
-                  <a:latin typeface="Impact" panose="020B0806030902050204" pitchFamily="34" charset="0"/>
-                </a:rPr>
-                <a:t>PACERS</a:t>
-              </a:r>
-              <a:endParaRPr lang="en-GB" sz="2400" dirty="0">
-                <a:solidFill>
-                  <a:schemeClr val="bg1"/>
-                </a:solidFill>
-                <a:latin typeface="Impact" panose="020B0806030902050204" pitchFamily="34" charset="0"/>
-              </a:endParaRPr>
-            </a:p>
-          </p:txBody>
-        </p:sp>
-        <p:sp>
-          <p:nvSpPr>
-            <p:cNvPr id="16" name="TextBox 15">
-              <a:extLst>
-                <a:ext uri="{FF2B5EF4-FFF2-40B4-BE49-F238E27FC236}">
-                  <a16:creationId xmlns:a16="http://schemas.microsoft.com/office/drawing/2014/main" id="{0AC50849-0F59-D96C-7652-571E31538386}"/>
-                </a:ext>
-              </a:extLst>
-            </p:cNvPr>
-            <p:cNvSpPr txBox="1"/>
-            <p:nvPr userDrawn="1"/>
-          </p:nvSpPr>
-          <p:spPr>
-            <a:xfrm>
-              <a:off x="717471" y="6531803"/>
-              <a:ext cx="1805810" cy="377026"/>
-            </a:xfrm>
-            <a:prstGeom prst="rect">
-              <a:avLst/>
-            </a:prstGeom>
-            <a:noFill/>
-          </p:spPr>
-          <p:txBody>
-            <a:bodyPr wrap="square" rtlCol="0">
-              <a:spAutoFit/>
-            </a:bodyPr>
-            <a:lstStyle/>
-            <a:p>
-              <a:r>
-                <a:rPr lang="en-US" sz="1850" dirty="0">
-                  <a:solidFill>
-                    <a:schemeClr val="bg1"/>
-                  </a:solidFill>
-                  <a:latin typeface="Arial Narrow" panose="020B0606020202030204" pitchFamily="34" charset="0"/>
-                </a:rPr>
-                <a:t>sajid.buet.ac.bd</a:t>
-              </a:r>
-              <a:endParaRPr lang="en-GB" sz="1850" dirty="0">
-                <a:solidFill>
-                  <a:schemeClr val="bg1"/>
-                </a:solidFill>
-                <a:latin typeface="Arial Narrow" panose="020B0606020202030204" pitchFamily="34" charset="0"/>
-              </a:endParaRPr>
-            </a:p>
-          </p:txBody>
-        </p:sp>
-      </p:grpSp>
       <p:pic>
         <p:nvPicPr>
           <p:cNvPr id="17" name="Picture 2">
@@ -18838,7 +19726,7 @@
           <p:nvPr userDrawn="1"/>
         </p:nvPicPr>
         <p:blipFill>
-          <a:blip r:embed="rId23">
+          <a:blip r:embed="rId19">
             <a:extLst>
               <a:ext uri="{28A0092B-C50C-407E-A947-70E740481C1C}">
                 <a14:useLocalDpi xmlns:a14="http://schemas.microsoft.com/office/drawing/2010/main" val="0"/>
@@ -18885,7 +19773,9 @@
           <p:nvPr userDrawn="1"/>
         </p:nvPicPr>
         <p:blipFill>
-          <a:blip r:embed="rId24"/>
+          <a:blip r:embed="rId20">
+            <a:lum bright="-40000" contrast="-40000"/>
+          </a:blip>
           <a:stretch>
             <a:fillRect/>
           </a:stretch>
@@ -18894,6 +19784,42 @@
           <a:xfrm>
             <a:off x="31433" y="6231707"/>
             <a:ext cx="1215838" cy="443413"/>
+          </a:xfrm>
+          <a:prstGeom prst="rect">
+            <a:avLst/>
+          </a:prstGeom>
+        </p:spPr>
+      </p:pic>
+      <p:pic>
+        <p:nvPicPr>
+          <p:cNvPr id="3" name="Graphic 1">
+            <a:extLst>
+              <a:ext uri="{FF2B5EF4-FFF2-40B4-BE49-F238E27FC236}">
+                <a16:creationId xmlns:a16="http://schemas.microsoft.com/office/drawing/2014/main" id="{AB3CC94E-4748-0374-7ED5-05B43B3E8DFE}"/>
+              </a:ext>
+            </a:extLst>
+          </p:cNvPr>
+          <p:cNvPicPr>
+            <a:picLocks noChangeAspect="1"/>
+          </p:cNvPicPr>
+          <p:nvPr userDrawn="1"/>
+        </p:nvPicPr>
+        <p:blipFill>
+          <a:blip r:embed="rId21">
+            <a:extLst>
+              <a:ext uri="{96DAC541-7B7A-43D3-8B79-37D633B846F1}">
+                <asvg:svgBlip xmlns:asvg="http://schemas.microsoft.com/office/drawing/2016/SVG/main" r:embed="rId22"/>
+              </a:ext>
+            </a:extLst>
+          </a:blip>
+          <a:stretch>
+            <a:fillRect/>
+          </a:stretch>
+        </p:blipFill>
+        <p:spPr>
+          <a:xfrm>
+            <a:off x="10003525" y="6232339"/>
+            <a:ext cx="1923326" cy="476504"/>
           </a:xfrm>
           <a:prstGeom prst="rect">
             <a:avLst/>
@@ -18948,9 +19874,9 @@
           <a:srgbClr val="000000"/>
         </a:buClr>
         <a:buFont typeface="Arial"/>
-        <a:defRPr sz="1400" b="0" i="0" u="none" strike="noStrike" cap="none">
+        <a:defRPr sz="4000" b="0" i="0" u="none" strike="noStrike" cap="none">
           <a:solidFill>
-            <a:srgbClr val="000000"/>
+            <a:srgbClr val="1DA3B8"/>
           </a:solidFill>
           <a:latin typeface="Arial"/>
           <a:ea typeface="Arial"/>
@@ -19177,7 +20103,7 @@
           <a:srgbClr val="000000"/>
         </a:buClr>
         <a:buFont typeface="Arial"/>
-        <a:defRPr sz="1400" b="0" i="0" u="none" strike="noStrike" cap="none">
+        <a:defRPr sz="2400" b="0" i="0" u="none" strike="noStrike" cap="none">
           <a:solidFill>
             <a:srgbClr val="000000"/>
           </a:solidFill>
@@ -19668,7 +20594,7 @@
             <a:r>
               <a:rPr lang="en-US" sz="3600" b="1" dirty="0">
                 <a:solidFill>
-                  <a:srgbClr val="C00000"/>
+                  <a:srgbClr val="1DA3B8"/>
                 </a:solidFill>
               </a:rPr>
               <a:t>Towards High-performance Quantum-based LEDs: Optoelectronic Modulation of 2D Silicon Carbide for Tunable and Efficient White Light Emission</a:t>
@@ -19676,14 +20602,14 @@
             <a:r>
               <a:rPr lang="en-US" sz="2400" dirty="0">
                 <a:solidFill>
-                  <a:srgbClr val="C00000"/>
+                  <a:srgbClr val="1DA3B8"/>
                 </a:solidFill>
               </a:rPr>
               <a:t> </a:t>
             </a:r>
             <a:endParaRPr sz="2400" dirty="0">
               <a:solidFill>
-                <a:srgbClr val="C00000"/>
+                <a:srgbClr val="1DA3B8"/>
               </a:solidFill>
               <a:latin typeface="Arial Black"/>
               <a:ea typeface="Arial Black"/>
@@ -19937,7 +20863,7 @@
             <a:r>
               <a:rPr lang="en-GB" b="0" i="0" dirty="0">
                 <a:solidFill>
-                  <a:srgbClr val="C00000"/>
+                  <a:srgbClr val="1DA3B8"/>
                 </a:solidFill>
                 <a:effectLst/>
                 <a:latin typeface="+mj-lt"/>
@@ -19946,7 +20872,7 @@
             </a:r>
             <a:endParaRPr lang="en-GB" dirty="0">
               <a:solidFill>
-                <a:srgbClr val="C00000"/>
+                <a:srgbClr val="1DA3B8"/>
               </a:solidFill>
               <a:latin typeface="+mj-lt"/>
             </a:endParaRPr>
@@ -19996,7 +20922,7 @@
             <a:r>
               <a:rPr lang="en-GB" dirty="0">
                 <a:solidFill>
-                  <a:srgbClr val="C00000"/>
+                  <a:srgbClr val="1DA3B8"/>
                 </a:solidFill>
               </a:rPr>
               <a:t>4P1a - </a:t>
@@ -20004,12 +20930,16 @@
             <a:r>
               <a:rPr lang="en-US" dirty="0">
                 <a:solidFill>
-                  <a:srgbClr val="C00000"/>
+                  <a:srgbClr val="1DA3B8"/>
                 </a:solidFill>
               </a:rPr>
               <a:t>Optoelectronic Devices and Integration</a:t>
             </a:r>
-            <a:endParaRPr lang="en-GB" dirty="0"/>
+            <a:endParaRPr lang="en-GB" dirty="0">
+              <a:solidFill>
+                <a:srgbClr val="1DA3B8"/>
+              </a:solidFill>
+            </a:endParaRPr>
           </a:p>
         </p:txBody>
       </p:sp>
@@ -20054,12 +20984,12 @@
             <a:r>
               <a:rPr lang="en-GB" b="0" i="0" dirty="0">
                 <a:solidFill>
-                  <a:srgbClr val="C00000"/>
+                  <a:srgbClr val="1DA3B8"/>
                 </a:solidFill>
                 <a:effectLst/>
                 <a:latin typeface="+mj-lt"/>
               </a:rPr>
-              <a:t>2025-05-08</a:t>
+              <a:t>2025-05-08 	</a:t>
             </a:r>
             <a:r>
               <a:rPr lang="en-GB" b="0" i="0" dirty="0">
@@ -20069,12 +20999,12 @@
                 <a:effectLst/>
                 <a:latin typeface="+mj-lt"/>
               </a:rPr>
-              <a:t> 		Time:  </a:t>
+              <a:t>	Time:  </a:t>
             </a:r>
             <a:r>
               <a:rPr lang="en-GB" b="0" i="0" dirty="0">
                 <a:solidFill>
-                  <a:srgbClr val="C00000"/>
+                  <a:srgbClr val="1DA3B8"/>
                 </a:solidFill>
                 <a:effectLst/>
                 <a:latin typeface="+mj-lt"/>
@@ -20094,7 +21024,7 @@
             <a:r>
               <a:rPr lang="en-GB" b="0" i="0" dirty="0">
                 <a:solidFill>
-                  <a:srgbClr val="C00000"/>
+                  <a:srgbClr val="1DA3B8"/>
                 </a:solidFill>
                 <a:effectLst/>
                 <a:latin typeface="+mj-lt"/>
@@ -20310,10 +21240,18 @@
               <a:buNone/>
             </a:pPr>
             <a:r>
-              <a:rPr lang="en-US" dirty="0"/>
+              <a:rPr lang="en-US" dirty="0">
+                <a:solidFill>
+                  <a:srgbClr val="1DA3B8"/>
+                </a:solidFill>
+              </a:rPr>
               <a:t>Outline of Presentation</a:t>
             </a:r>
-            <a:endParaRPr dirty="0"/>
+            <a:endParaRPr dirty="0">
+              <a:solidFill>
+                <a:srgbClr val="1DA3B8"/>
+              </a:solidFill>
+            </a:endParaRPr>
           </a:p>
         </p:txBody>
       </p:sp>
@@ -20429,6 +21367,9 @@
             <a:chOff x="0" y="23346"/>
             <a:chExt cx="5303837" cy="4345918"/>
           </a:xfrm>
+          <a:solidFill>
+            <a:srgbClr val="1DA3B8"/>
+          </a:solidFill>
         </p:grpSpPr>
         <p:sp>
           <p:nvSpPr>
@@ -20446,9 +21387,7 @@
                 <a:gd name="adj" fmla="val 16667"/>
               </a:avLst>
             </a:prstGeom>
-            <a:solidFill>
-              <a:srgbClr val="C00000"/>
-            </a:solidFill>
+            <a:grpFill/>
             <a:ln w="12700" cap="flat" cmpd="sng">
               <a:solidFill>
                 <a:schemeClr val="lt1"/>
@@ -20492,7 +21431,7 @@
             <a:prstGeom prst="rect">
               <a:avLst/>
             </a:prstGeom>
-            <a:noFill/>
+            <a:grpFill/>
             <a:ln>
               <a:noFill/>
             </a:ln>
@@ -20544,9 +21483,7 @@
                 <a:gd name="adj" fmla="val 16667"/>
               </a:avLst>
             </a:prstGeom>
-            <a:solidFill>
-              <a:srgbClr val="C00000"/>
-            </a:solidFill>
+            <a:grpFill/>
             <a:ln w="12700" cap="flat" cmpd="sng">
               <a:solidFill>
                 <a:schemeClr val="lt1"/>
@@ -20590,7 +21527,7 @@
             <a:prstGeom prst="rect">
               <a:avLst/>
             </a:prstGeom>
-            <a:noFill/>
+            <a:grpFill/>
             <a:ln>
               <a:noFill/>
             </a:ln>
@@ -20642,9 +21579,7 @@
                 <a:gd name="adj" fmla="val 16667"/>
               </a:avLst>
             </a:prstGeom>
-            <a:solidFill>
-              <a:srgbClr val="C00000"/>
-            </a:solidFill>
+            <a:grpFill/>
             <a:ln w="12700" cap="flat" cmpd="sng">
               <a:solidFill>
                 <a:schemeClr val="lt1"/>
@@ -20688,7 +21623,7 @@
             <a:prstGeom prst="rect">
               <a:avLst/>
             </a:prstGeom>
-            <a:noFill/>
+            <a:grpFill/>
             <a:ln>
               <a:noFill/>
             </a:ln>
@@ -20740,9 +21675,7 @@
                 <a:gd name="adj" fmla="val 16667"/>
               </a:avLst>
             </a:prstGeom>
-            <a:solidFill>
-              <a:srgbClr val="C00000"/>
-            </a:solidFill>
+            <a:grpFill/>
             <a:ln w="12700" cap="flat" cmpd="sng">
               <a:solidFill>
                 <a:schemeClr val="lt1"/>
@@ -20786,7 +21719,7 @@
             <a:prstGeom prst="rect">
               <a:avLst/>
             </a:prstGeom>
-            <a:noFill/>
+            <a:grpFill/>
             <a:ln>
               <a:noFill/>
             </a:ln>
@@ -20838,9 +21771,7 @@
                 <a:gd name="adj" fmla="val 16667"/>
               </a:avLst>
             </a:prstGeom>
-            <a:solidFill>
-              <a:srgbClr val="C00000"/>
-            </a:solidFill>
+            <a:grpFill/>
             <a:ln w="12700" cap="flat" cmpd="sng">
               <a:solidFill>
                 <a:schemeClr val="lt1"/>
@@ -20884,7 +21815,7 @@
             <a:prstGeom prst="rect">
               <a:avLst/>
             </a:prstGeom>
-            <a:noFill/>
+            <a:grpFill/>
             <a:ln>
               <a:noFill/>
             </a:ln>
@@ -20944,9 +21875,7 @@
                 <a:gd name="adj" fmla="val 16667"/>
               </a:avLst>
             </a:prstGeom>
-            <a:solidFill>
-              <a:srgbClr val="C00000"/>
-            </a:solidFill>
+            <a:grpFill/>
             <a:ln w="12700" cap="flat" cmpd="sng">
               <a:solidFill>
                 <a:schemeClr val="lt1"/>
@@ -20990,7 +21919,7 @@
             <a:prstGeom prst="rect">
               <a:avLst/>
             </a:prstGeom>
-            <a:noFill/>
+            <a:grpFill/>
             <a:ln>
               <a:noFill/>
             </a:ln>
@@ -21050,9 +21979,7 @@
                 <a:gd name="adj" fmla="val 16667"/>
               </a:avLst>
             </a:prstGeom>
-            <a:solidFill>
-              <a:srgbClr val="C00000"/>
-            </a:solidFill>
+            <a:grpFill/>
             <a:ln w="12700" cap="flat" cmpd="sng">
               <a:solidFill>
                 <a:schemeClr val="lt1"/>
@@ -21096,7 +22023,7 @@
             <a:prstGeom prst="rect">
               <a:avLst/>
             </a:prstGeom>
-            <a:noFill/>
+            <a:grpFill/>
             <a:ln>
               <a:noFill/>
             </a:ln>
@@ -21507,14 +22434,41 @@
               <a:buSzPts val="4400"/>
             </a:pPr>
             <a:r>
-              <a:rPr lang="en-GB" sz="1800" b="1"/>
-              <a:t>Towards High-performance Quantum-based LEDs: Optoelectronic Modulation of 2D Silicon Carbide for Tunable and Efficient White Light Emission</a:t>
+              <a:rPr lang="en-GB" sz="1800" b="1" dirty="0">
+                <a:solidFill>
+                  <a:srgbClr val="1DA3B8"/>
+                </a:solidFill>
+              </a:rPr>
+              <a:t>Towards High-performance Quantum-based LEDs: Optoelectronic Modulation of 2D Silicon Carbide for </a:t>
             </a:r>
             <a:r>
-              <a:rPr lang="en-GB" sz="1200"/>
+              <a:rPr lang="en-GB" sz="1800" b="1" dirty="0" err="1">
+                <a:solidFill>
+                  <a:srgbClr val="1DA3B8"/>
+                </a:solidFill>
+              </a:rPr>
+              <a:t>Tunable</a:t>
+            </a:r>
+            <a:r>
+              <a:rPr lang="en-GB" sz="1800" b="1" dirty="0">
+                <a:solidFill>
+                  <a:srgbClr val="1DA3B8"/>
+                </a:solidFill>
+              </a:rPr>
+              <a:t> and Efficient White Light Emission</a:t>
+            </a:r>
+            <a:r>
+              <a:rPr lang="en-GB" sz="1200" dirty="0">
+                <a:solidFill>
+                  <a:srgbClr val="1DA3B8"/>
+                </a:solidFill>
+              </a:rPr>
               <a:t> </a:t>
             </a:r>
             <a:endParaRPr lang="en-GB" sz="1200" dirty="0">
+              <a:solidFill>
+                <a:srgbClr val="1DA3B8"/>
+              </a:solidFill>
               <a:latin typeface="Arial Black"/>
               <a:ea typeface="Arial Black"/>
               <a:cs typeface="Arial Black"/>
@@ -26071,7 +27025,7 @@
         <p:spPr/>
         <p:txBody>
           <a:bodyPr>
-            <a:normAutofit fontScale="90000"/>
+            <a:normAutofit/>
           </a:bodyPr>
           <a:lstStyle/>
           <a:p>
@@ -27802,18 +28756,18 @@
 <file path=ppt/theme/theme1.xml><?xml version="1.0" encoding="utf-8"?>
 <a:theme xmlns:a="http://schemas.openxmlformats.org/drawingml/2006/main" name="Savon">
   <a:themeElements>
-    <a:clrScheme name="Savon">
+    <a:clrScheme name="Custom 2">
       <a:dk1>
-        <a:srgbClr val="000000"/>
+        <a:sysClr val="windowText" lastClr="000000"/>
       </a:dk1>
       <a:lt1>
-        <a:srgbClr val="FFFFFF"/>
+        <a:sysClr val="window" lastClr="FFFFFF"/>
       </a:lt1>
       <a:dk2>
-        <a:srgbClr val="1485A4"/>
+        <a:srgbClr val="335B74"/>
       </a:dk2>
       <a:lt2>
-        <a:srgbClr val="E3DED1"/>
+        <a:srgbClr val="DFE3E5"/>
       </a:lt2>
       <a:accent1>
         <a:srgbClr val="1CADE4"/>
@@ -27834,10 +28788,10 @@
         <a:srgbClr val="62A39F"/>
       </a:accent6>
       <a:hlink>
-        <a:srgbClr val="F49100"/>
+        <a:srgbClr val="6EAC1C"/>
       </a:hlink>
       <a:folHlink>
-        <a:srgbClr val="739D9B"/>
+        <a:srgbClr val="B26B02"/>
       </a:folHlink>
     </a:clrScheme>
     <a:fontScheme name="Office">
@@ -28362,15 +29316,6 @@
 </file>
 
 <file path=customXml/item1.xml><?xml version="1.0" encoding="utf-8"?>
-<?mso-contentType ?>
-<FormTemplates xmlns="http://schemas.microsoft.com/sharepoint/v3/contenttype/forms">
-  <Display>DocumentLibraryForm</Display>
-  <Edit>DocumentLibraryForm</Edit>
-  <New>DocumentLibraryForm</New>
-</FormTemplates>
-</file>
-
-<file path=customXml/item2.xml><?xml version="1.0" encoding="utf-8"?>
 <ct:contentTypeSchema xmlns:ct="http://schemas.microsoft.com/office/2006/metadata/contentType" xmlns:ma="http://schemas.microsoft.com/office/2006/metadata/properties/metaAttributes" ct:_="" ma:_="" ma:contentTypeName="Document" ma:contentTypeID="0x010100B0CBAC23D464FD4183DA84A852207DA6" ma:contentTypeVersion="3" ma:contentTypeDescription="Create a new document." ma:contentTypeScope="" ma:versionID="f04cc84cf1c1be86cd6a496440d9c8db">
   <xsd:schema xmlns:xsd="http://www.w3.org/2001/XMLSchema" xmlns:xs="http://www.w3.org/2001/XMLSchema" xmlns:p="http://schemas.microsoft.com/office/2006/metadata/properties" xmlns:ns2="0b0c89cc-be23-4df2-bf43-b7276027b939" targetNamespace="http://schemas.microsoft.com/office/2006/metadata/properties" ma:root="true" ma:fieldsID="c8633b5dcd90e27b182d618df17d93e8" ns2:_="">
     <xsd:import namespace="0b0c89cc-be23-4df2-bf43-b7276027b939"/>
@@ -28508,6 +29453,15 @@
 </ct:contentTypeSchema>
 </file>
 
+<file path=customXml/item2.xml><?xml version="1.0" encoding="utf-8"?>
+<?mso-contentType ?>
+<FormTemplates xmlns="http://schemas.microsoft.com/sharepoint/v3/contenttype/forms">
+  <Display>DocumentLibraryForm</Display>
+  <Edit>DocumentLibraryForm</Edit>
+  <New>DocumentLibraryForm</New>
+</FormTemplates>
+</file>
+
 <file path=customXml/item3.xml><?xml version="1.0" encoding="utf-8"?>
 <p:properties xmlns:p="http://schemas.microsoft.com/office/2006/metadata/properties" xmlns:xsi="http://www.w3.org/2001/XMLSchema-instance" xmlns:pc="http://schemas.microsoft.com/office/infopath/2007/PartnerControls">
   <documentManagement/>
@@ -28515,15 +29469,29 @@
 </file>
 
 <file path=customXml/itemProps1.xml><?xml version="1.0" encoding="utf-8"?>
+<ds:datastoreItem xmlns:ds="http://schemas.openxmlformats.org/officeDocument/2006/customXml" ds:itemID="{4D94B693-854D-4D86-9DE3-1FC3C517E4C0}">
+  <ds:schemaRefs>
+    <ds:schemaRef ds:uri="http://schemas.microsoft.com/office/2006/metadata/contentType"/>
+    <ds:schemaRef ds:uri="http://schemas.microsoft.com/office/2006/metadata/properties/metaAttributes"/>
+    <ds:schemaRef ds:uri="http://www.w3.org/2001/XMLSchema"/>
+    <ds:schemaRef ds:uri="http://schemas.microsoft.com/office/2006/metadata/properties"/>
+    <ds:schemaRef ds:uri="0b0c89cc-be23-4df2-bf43-b7276027b939"/>
+    <ds:schemaRef ds:uri="http://schemas.microsoft.com/office/2006/documentManagement/types"/>
+    <ds:schemaRef ds:uri="http://schemas.microsoft.com/office/infopath/2007/PartnerControls"/>
+    <ds:schemaRef ds:uri="http://schemas.openxmlformats.org/package/2006/metadata/core-properties"/>
+    <ds:schemaRef ds:uri="http://purl.org/dc/elements/1.1/"/>
+    <ds:schemaRef ds:uri="http://purl.org/dc/terms/"/>
+    <ds:schemaRef ds:uri="http://schemas.microsoft.com/internal/obd"/>
+  </ds:schemaRefs>
+</ds:datastoreItem>
+</file>
+
+<file path=customXml/itemProps2.xml><?xml version="1.0" encoding="utf-8"?>
 <ds:datastoreItem xmlns:ds="http://schemas.openxmlformats.org/officeDocument/2006/customXml" ds:itemID="{B2F115AB-94ED-4FD7-8511-5032A544EC37}">
   <ds:schemaRefs>
     <ds:schemaRef ds:uri="http://schemas.microsoft.com/sharepoint/v3/contenttype/forms"/>
   </ds:schemaRefs>
 </ds:datastoreItem>
-</file>
-
-<file path=customXml/itemProps2.xml><?xml version="1.0" encoding="utf-8"?>
-<ds:datastoreItem xmlns:ds="http://schemas.openxmlformats.org/officeDocument/2006/customXml" ds:itemID="{4D94B693-854D-4D86-9DE3-1FC3C517E4C0}"/>
 </file>
 
 <file path=customXml/itemProps3.xml><?xml version="1.0" encoding="utf-8"?>
